--- a/assets/结构图/问题方法结果-001/example.pptx
+++ b/assets/结构图/问题方法结果-001/example.pptx
@@ -2,13 +2,13 @@
 <file path=ppt/presentation.xml><?xml version="1.0" encoding="utf-8"?>
 <p:presentation xmlns:p="http://schemas.openxmlformats.org/presentationml/2006/main">
   <p:sldMasterIdLst>
-    <p:sldMasterId xmlns:r="http://schemas.openxmlformats.org/officeDocument/2006/relationships" id="2147483648" r:id="Rc57abc1012d34d63"/>
+    <p:sldMasterId xmlns:r="http://schemas.openxmlformats.org/officeDocument/2006/relationships" id="2147483648" r:id="R80afbbf1724c4fad"/>
   </p:sldMasterIdLst>
   <p:notesMasterIdLst>
-    <p:notesMasterId xmlns:r="http://schemas.openxmlformats.org/officeDocument/2006/relationships" r:id="Rb40cfc482fb24397"/>
+    <p:notesMasterId xmlns:r="http://schemas.openxmlformats.org/officeDocument/2006/relationships" r:id="R3725f948ef2e4ce1"/>
   </p:notesMasterIdLst>
   <p:sldIdLst>
-    <p:sldId xmlns:r="http://schemas.openxmlformats.org/officeDocument/2006/relationships" id="256" r:id="Rd86fa921747d43c2"/>
+    <p:sldId xmlns:r="http://schemas.openxmlformats.org/officeDocument/2006/relationships" id="256" r:id="Rf810d24ea2b543db"/>
   </p:sldIdLst>
   <p:sldSz cx="12192000" cy="6858000"/>
   <p:notesSz cx="6858000" cy="9144000"/>
@@ -360,6 +360,105 @@
         </a:effectStyle>
         <a:effectStyle>
           <a:effectLst>
+            <a:outerShdw blurRad="266700" dist="114300" dir="5400000">
+              <a:srgbClr val="2F5EA8">
+                <a:alpha val="22000"/>
+              </a:srgbClr>
+            </a:outerShdw>
+          </a:effectLst>
+        </a:effectStyle>
+        <a:effectStyle>
+          <a:effectLst>
+            <a:outerShdw blurRad="152400" dist="66675" dir="5400000">
+              <a:srgbClr val="2F5EA8">
+                <a:alpha val="9000"/>
+              </a:srgbClr>
+            </a:outerShdw>
+          </a:effectLst>
+        </a:effectStyle>
+        <a:effectStyle>
+          <a:effectLst>
+            <a:outerShdw blurRad="152400" dist="66675" dir="5400000">
+              <a:srgbClr val="2F5EA8">
+                <a:alpha val="10000"/>
+              </a:srgbClr>
+            </a:outerShdw>
+          </a:effectLst>
+        </a:effectStyle>
+        <a:effectStyle>
+          <a:effectLst>
+            <a:outerShdw blurRad="171450" dist="76200" dir="5400000">
+              <a:srgbClr val="2F5EA8">
+                <a:alpha val="16000"/>
+              </a:srgbClr>
+            </a:outerShdw>
+          </a:effectLst>
+        </a:effectStyle>
+        <a:effectStyle>
+          <a:effectLst>
+            <a:outerShdw blurRad="114300" dist="47625" dir="5400000">
+              <a:srgbClr val="2F5EA8">
+                <a:alpha val="7000"/>
+              </a:srgbClr>
+            </a:outerShdw>
+          </a:effectLst>
+        </a:effectStyle>
+        <a:effectStyle>
+          <a:effectLst>
+            <a:outerShdw blurRad="95250" dist="38100" dir="5400000">
+              <a:srgbClr val="2F5EA8">
+                <a:alpha val="8000"/>
+              </a:srgbClr>
+            </a:outerShdw>
+          </a:effectLst>
+        </a:effectStyle>
+        <a:effectStyle>
+          <a:effectLst>
+            <a:outerShdw blurRad="209550" dist="95250" dir="5400000">
+              <a:srgbClr val="2F5EA8">
+                <a:alpha val="8000"/>
+              </a:srgbClr>
+            </a:outerShdw>
+          </a:effectLst>
+        </a:effectStyle>
+        <a:effectStyle>
+          <a:effectLst>
+            <a:outerShdw blurRad="133350" dist="57150" dir="5400000">
+              <a:srgbClr val="2F5EA8">
+                <a:alpha val="18000"/>
+              </a:srgbClr>
+            </a:outerShdw>
+          </a:effectLst>
+        </a:effectStyle>
+        <a:effectStyle>
+          <a:effectLst>
+            <a:outerShdw blurRad="200025" dist="85725" dir="5400000">
+              <a:srgbClr val="2F5EA8">
+                <a:alpha val="14000"/>
+              </a:srgbClr>
+            </a:outerShdw>
+          </a:effectLst>
+        </a:effectStyle>
+        <a:effectStyle>
+          <a:effectLst>
+            <a:outerShdw blurRad="171450" dist="76200" dir="5400000">
+              <a:srgbClr val="264E80">
+                <a:alpha val="10000"/>
+              </a:srgbClr>
+            </a:outerShdw>
+          </a:effectLst>
+        </a:effectStyle>
+        <a:effectStyle>
+          <a:effectLst>
+            <a:outerShdw blurRad="171450" dist="76200" dir="5400000">
+              <a:srgbClr val="1F497E">
+                <a:alpha val="8000"/>
+              </a:srgbClr>
+            </a:outerShdw>
+          </a:effectLst>
+        </a:effectStyle>
+        <a:effectStyle>
+          <a:effectLst>
             <a:outerShdw blurRad="95250" dist="38100" dir="5400000">
               <a:srgbClr val="2F5EA8">
                 <a:alpha val="16000"/>
@@ -369,36 +468,36 @@
         </a:effectStyle>
         <a:effectStyle>
           <a:effectLst>
-            <a:outerShdw blurRad="171450" dist="76200" dir="5400000">
-              <a:srgbClr val="2F5EA8">
-                <a:alpha val="16000"/>
-              </a:srgbClr>
-            </a:outerShdw>
-          </a:effectLst>
-        </a:effectStyle>
-        <a:effectStyle>
-          <a:effectLst>
-            <a:outerShdw blurRad="152400" dist="66675" dir="5400000">
-              <a:srgbClr val="2F5EA8">
-                <a:alpha val="10000"/>
-              </a:srgbClr>
-            </a:outerShdw>
-          </a:effectLst>
-        </a:effectStyle>
-        <a:effectStyle>
-          <a:effectLst>
-            <a:outerShdw blurRad="152400" dist="66675" dir="5400000">
-              <a:srgbClr val="2F5EA8">
-                <a:alpha val="9000"/>
-              </a:srgbClr>
-            </a:outerShdw>
-          </a:effectLst>
-        </a:effectStyle>
-        <a:effectStyle>
-          <a:effectLst>
             <a:outerShdw blurRad="114300" dist="57150" dir="5400000">
               <a:srgbClr val="2F5EA8">
                 <a:alpha val="15000"/>
+              </a:srgbClr>
+            </a:outerShdw>
+          </a:effectLst>
+        </a:effectStyle>
+        <a:effectStyle>
+          <a:effectLst>
+            <a:outerShdw blurRad="114300" dist="47625" dir="5400000">
+              <a:srgbClr val="2F5EA8">
+                <a:alpha val="20000"/>
+              </a:srgbClr>
+            </a:outerShdw>
+          </a:effectLst>
+        </a:effectStyle>
+        <a:effectStyle>
+          <a:effectLst>
+            <a:outerShdw blurRad="190500" dist="85725" dir="5400000">
+              <a:srgbClr val="2F5EA8">
+                <a:alpha val="9000"/>
+              </a:srgbClr>
+            </a:outerShdw>
+          </a:effectLst>
+        </a:effectStyle>
+        <a:effectStyle>
+          <a:effectLst>
+            <a:outerShdw blurRad="266700" dist="133350" dir="5400000">
+              <a:srgbClr val="2F5EA8">
+                <a:alpha val="24000"/>
               </a:srgbClr>
             </a:outerShdw>
           </a:effectLst>
@@ -551,7 +650,7 @@
   </p:cSld>
   <p:clrMap bg1="lt1" tx1="dk1" bg2="lt2" tx2="dk2" accent1="accent1" accent2="accent2" accent3="accent3" accent4="accent4" accent5="accent5" accent6="accent6" hlink="hlink" folHlink="folHlink"/>
   <p:sldLayoutIdLst>
-    <p:sldLayoutId xmlns:r="http://schemas.openxmlformats.org/officeDocument/2006/relationships" id="2147483649" r:id="R63f93f33c0a74c3f"/>
+    <p:sldLayoutId xmlns:r="http://schemas.openxmlformats.org/officeDocument/2006/relationships" id="2147483649" r:id="R8362139aa5a64b0e"/>
   </p:sldLayoutIdLst>
   <p:txStyles>
     <p:titleStyle>
@@ -1036,6 +1135,105 @@
         </a:effectStyle>
         <a:effectStyle>
           <a:effectLst>
+            <a:outerShdw blurRad="266700" dist="114300" dir="5400000">
+              <a:srgbClr val="2F5EA8">
+                <a:alpha val="22000"/>
+              </a:srgbClr>
+            </a:outerShdw>
+          </a:effectLst>
+        </a:effectStyle>
+        <a:effectStyle>
+          <a:effectLst>
+            <a:outerShdw blurRad="152400" dist="66675" dir="5400000">
+              <a:srgbClr val="2F5EA8">
+                <a:alpha val="9000"/>
+              </a:srgbClr>
+            </a:outerShdw>
+          </a:effectLst>
+        </a:effectStyle>
+        <a:effectStyle>
+          <a:effectLst>
+            <a:outerShdw blurRad="152400" dist="66675" dir="5400000">
+              <a:srgbClr val="2F5EA8">
+                <a:alpha val="10000"/>
+              </a:srgbClr>
+            </a:outerShdw>
+          </a:effectLst>
+        </a:effectStyle>
+        <a:effectStyle>
+          <a:effectLst>
+            <a:outerShdw blurRad="171450" dist="76200" dir="5400000">
+              <a:srgbClr val="2F5EA8">
+                <a:alpha val="16000"/>
+              </a:srgbClr>
+            </a:outerShdw>
+          </a:effectLst>
+        </a:effectStyle>
+        <a:effectStyle>
+          <a:effectLst>
+            <a:outerShdw blurRad="114300" dist="47625" dir="5400000">
+              <a:srgbClr val="2F5EA8">
+                <a:alpha val="7000"/>
+              </a:srgbClr>
+            </a:outerShdw>
+          </a:effectLst>
+        </a:effectStyle>
+        <a:effectStyle>
+          <a:effectLst>
+            <a:outerShdw blurRad="95250" dist="38100" dir="5400000">
+              <a:srgbClr val="2F5EA8">
+                <a:alpha val="8000"/>
+              </a:srgbClr>
+            </a:outerShdw>
+          </a:effectLst>
+        </a:effectStyle>
+        <a:effectStyle>
+          <a:effectLst>
+            <a:outerShdw blurRad="209550" dist="95250" dir="5400000">
+              <a:srgbClr val="2F5EA8">
+                <a:alpha val="8000"/>
+              </a:srgbClr>
+            </a:outerShdw>
+          </a:effectLst>
+        </a:effectStyle>
+        <a:effectStyle>
+          <a:effectLst>
+            <a:outerShdw blurRad="133350" dist="57150" dir="5400000">
+              <a:srgbClr val="2F5EA8">
+                <a:alpha val="18000"/>
+              </a:srgbClr>
+            </a:outerShdw>
+          </a:effectLst>
+        </a:effectStyle>
+        <a:effectStyle>
+          <a:effectLst>
+            <a:outerShdw blurRad="200025" dist="85725" dir="5400000">
+              <a:srgbClr val="2F5EA8">
+                <a:alpha val="14000"/>
+              </a:srgbClr>
+            </a:outerShdw>
+          </a:effectLst>
+        </a:effectStyle>
+        <a:effectStyle>
+          <a:effectLst>
+            <a:outerShdw blurRad="171450" dist="76200" dir="5400000">
+              <a:srgbClr val="264E80">
+                <a:alpha val="10000"/>
+              </a:srgbClr>
+            </a:outerShdw>
+          </a:effectLst>
+        </a:effectStyle>
+        <a:effectStyle>
+          <a:effectLst>
+            <a:outerShdw blurRad="171450" dist="76200" dir="5400000">
+              <a:srgbClr val="1F497E">
+                <a:alpha val="8000"/>
+              </a:srgbClr>
+            </a:outerShdw>
+          </a:effectLst>
+        </a:effectStyle>
+        <a:effectStyle>
+          <a:effectLst>
             <a:outerShdw blurRad="95250" dist="38100" dir="5400000">
               <a:srgbClr val="2F5EA8">
                 <a:alpha val="16000"/>
@@ -1045,36 +1243,36 @@
         </a:effectStyle>
         <a:effectStyle>
           <a:effectLst>
-            <a:outerShdw blurRad="171450" dist="76200" dir="5400000">
-              <a:srgbClr val="2F5EA8">
-                <a:alpha val="16000"/>
-              </a:srgbClr>
-            </a:outerShdw>
-          </a:effectLst>
-        </a:effectStyle>
-        <a:effectStyle>
-          <a:effectLst>
-            <a:outerShdw blurRad="152400" dist="66675" dir="5400000">
-              <a:srgbClr val="2F5EA8">
-                <a:alpha val="10000"/>
-              </a:srgbClr>
-            </a:outerShdw>
-          </a:effectLst>
-        </a:effectStyle>
-        <a:effectStyle>
-          <a:effectLst>
-            <a:outerShdw blurRad="152400" dist="66675" dir="5400000">
-              <a:srgbClr val="2F5EA8">
-                <a:alpha val="9000"/>
-              </a:srgbClr>
-            </a:outerShdw>
-          </a:effectLst>
-        </a:effectStyle>
-        <a:effectStyle>
-          <a:effectLst>
             <a:outerShdw blurRad="114300" dist="57150" dir="5400000">
               <a:srgbClr val="2F5EA8">
                 <a:alpha val="15000"/>
+              </a:srgbClr>
+            </a:outerShdw>
+          </a:effectLst>
+        </a:effectStyle>
+        <a:effectStyle>
+          <a:effectLst>
+            <a:outerShdw blurRad="114300" dist="47625" dir="5400000">
+              <a:srgbClr val="2F5EA8">
+                <a:alpha val="20000"/>
+              </a:srgbClr>
+            </a:outerShdw>
+          </a:effectLst>
+        </a:effectStyle>
+        <a:effectStyle>
+          <a:effectLst>
+            <a:outerShdw blurRad="190500" dist="85725" dir="5400000">
+              <a:srgbClr val="2F5EA8">
+                <a:alpha val="9000"/>
+              </a:srgbClr>
+            </a:outerShdw>
+          </a:effectLst>
+        </a:effectStyle>
+        <a:effectStyle>
+          <a:effectLst>
+            <a:outerShdw blurRad="266700" dist="133350" dir="5400000">
+              <a:srgbClr val="2F5EA8">
+                <a:alpha val="24000"/>
               </a:srgbClr>
             </a:outerShdw>
           </a:effectLst>
@@ -1147,7 +1345,7 @@
           <p:cNvPr id="48" name="problem-method-link-0">
             <a:extLst xmlns:a="http://schemas.openxmlformats.org/drawingml/2006/main">
               <a:ext uri="{FF2B5EF4-FFF2-40B4-BE49-F238E27FC236}">
-                <a16:creationId xmlns:a16="http://schemas.microsoft.com/office/drawing/2014/main" id="{F844AFA5-ECE8-44EB-861B-230262AD3ECD}"/>
+                <a16:creationId xmlns:a16="http://schemas.microsoft.com/office/drawing/2014/main" id="{5486227A-4B3A-40B4-A7AA-479092B3DC0D}"/>
               </a:ext>
             </a:extLst>
           </p:cNvPr>
@@ -1178,7 +1376,7 @@
           <p:cNvPr id="2" name="problem-method-anchor-0">
             <a:extLst xmlns:a="http://schemas.openxmlformats.org/drawingml/2006/main">
               <a:ext uri="{FF2B5EF4-FFF2-40B4-BE49-F238E27FC236}">
-                <a16:creationId xmlns:a16="http://schemas.microsoft.com/office/drawing/2014/main" id="{1808CE1D-AA9C-41C8-AB56-65A719D95290}"/>
+                <a16:creationId xmlns:a16="http://schemas.microsoft.com/office/drawing/2014/main" id="{E18E8BD8-AD91-4A8A-B737-5E91F55B91D6}"/>
               </a:ext>
             </a:extLst>
           </p:cNvPr>
@@ -1211,7 +1409,7 @@
           <p:cNvPr id="3" name="problem-method-link-1">
             <a:extLst xmlns:a="http://schemas.openxmlformats.org/drawingml/2006/main">
               <a:ext uri="{FF2B5EF4-FFF2-40B4-BE49-F238E27FC236}">
-                <a16:creationId xmlns:a16="http://schemas.microsoft.com/office/drawing/2014/main" id="{30BFAB9F-A9C6-4B14-BFF2-31FA381C1651}"/>
+                <a16:creationId xmlns:a16="http://schemas.microsoft.com/office/drawing/2014/main" id="{F1EE93A9-8EA9-41AD-B942-ADFAB09FBF87}"/>
               </a:ext>
             </a:extLst>
           </p:cNvPr>
@@ -1242,7 +1440,7 @@
           <p:cNvPr id="4" name="problem-method-anchor-1">
             <a:extLst xmlns:a="http://schemas.openxmlformats.org/drawingml/2006/main">
               <a:ext uri="{FF2B5EF4-FFF2-40B4-BE49-F238E27FC236}">
-                <a16:creationId xmlns:a16="http://schemas.microsoft.com/office/drawing/2014/main" id="{6820EBD0-70FB-4CF4-958D-E0A187F9B3B8}"/>
+                <a16:creationId xmlns:a16="http://schemas.microsoft.com/office/drawing/2014/main" id="{7DD56F24-871B-4477-873B-2A81C4581501}"/>
               </a:ext>
             </a:extLst>
           </p:cNvPr>
@@ -1275,7 +1473,7 @@
           <p:cNvPr id="5" name="problem-method-link-2">
             <a:extLst xmlns:a="http://schemas.openxmlformats.org/drawingml/2006/main">
               <a:ext uri="{FF2B5EF4-FFF2-40B4-BE49-F238E27FC236}">
-                <a16:creationId xmlns:a16="http://schemas.microsoft.com/office/drawing/2014/main" id="{1E9415B3-539A-4E43-BB32-D636FE47B60B}"/>
+                <a16:creationId xmlns:a16="http://schemas.microsoft.com/office/drawing/2014/main" id="{6E441BEC-6D1D-40DE-A5F6-15C5F8FF38FE}"/>
               </a:ext>
             </a:extLst>
           </p:cNvPr>
@@ -1306,7 +1504,7 @@
           <p:cNvPr id="6" name="problem-method-anchor-2">
             <a:extLst xmlns:a="http://schemas.openxmlformats.org/drawingml/2006/main">
               <a:ext uri="{FF2B5EF4-FFF2-40B4-BE49-F238E27FC236}">
-                <a16:creationId xmlns:a16="http://schemas.microsoft.com/office/drawing/2014/main" id="{53F48ED5-663E-4254-9EC0-23CC02267F52}"/>
+                <a16:creationId xmlns:a16="http://schemas.microsoft.com/office/drawing/2014/main" id="{7CB715DE-B766-4694-9C5B-7F2E40A9F578}"/>
               </a:ext>
             </a:extLst>
           </p:cNvPr>
@@ -1339,7 +1537,7 @@
           <p:cNvPr id="7" name="method-bus-link-0">
             <a:extLst xmlns:a="http://schemas.openxmlformats.org/drawingml/2006/main">
               <a:ext uri="{FF2B5EF4-FFF2-40B4-BE49-F238E27FC236}">
-                <a16:creationId xmlns:a16="http://schemas.microsoft.com/office/drawing/2014/main" id="{A0F35263-0900-466D-8B55-A919EAD4D13E}"/>
+                <a16:creationId xmlns:a16="http://schemas.microsoft.com/office/drawing/2014/main" id="{9DCB7FBD-46FF-48A9-ACE4-2F6E2731896F}"/>
               </a:ext>
             </a:extLst>
           </p:cNvPr>
@@ -1370,7 +1568,7 @@
           <p:cNvPr id="8" name="method-bus-anchor-0">
             <a:extLst xmlns:a="http://schemas.openxmlformats.org/drawingml/2006/main">
               <a:ext uri="{FF2B5EF4-FFF2-40B4-BE49-F238E27FC236}">
-                <a16:creationId xmlns:a16="http://schemas.microsoft.com/office/drawing/2014/main" id="{D7834E82-A2AE-41E8-8B12-129252F85ED3}"/>
+                <a16:creationId xmlns:a16="http://schemas.microsoft.com/office/drawing/2014/main" id="{25C7F6AD-FCDB-4B4D-9251-29CDFC1233C2}"/>
               </a:ext>
             </a:extLst>
           </p:cNvPr>
@@ -1403,7 +1601,7 @@
           <p:cNvPr id="9" name="method-bus-link-1">
             <a:extLst xmlns:a="http://schemas.openxmlformats.org/drawingml/2006/main">
               <a:ext uri="{FF2B5EF4-FFF2-40B4-BE49-F238E27FC236}">
-                <a16:creationId xmlns:a16="http://schemas.microsoft.com/office/drawing/2014/main" id="{2EA852BB-50E0-4BCC-818B-A6B094A31DCB}"/>
+                <a16:creationId xmlns:a16="http://schemas.microsoft.com/office/drawing/2014/main" id="{3E2A6B71-49C9-409D-96BB-D5603F93A417}"/>
               </a:ext>
             </a:extLst>
           </p:cNvPr>
@@ -1434,7 +1632,7 @@
           <p:cNvPr id="10" name="method-bus-anchor-1">
             <a:extLst xmlns:a="http://schemas.openxmlformats.org/drawingml/2006/main">
               <a:ext uri="{FF2B5EF4-FFF2-40B4-BE49-F238E27FC236}">
-                <a16:creationId xmlns:a16="http://schemas.microsoft.com/office/drawing/2014/main" id="{3A05DFBE-9752-4AE4-A823-758F5405C192}"/>
+                <a16:creationId xmlns:a16="http://schemas.microsoft.com/office/drawing/2014/main" id="{7BB94A28-51E1-468E-A204-4A8EEB6B30BA}"/>
               </a:ext>
             </a:extLst>
           </p:cNvPr>
@@ -1467,7 +1665,7 @@
           <p:cNvPr id="11" name="method-bus-link-2">
             <a:extLst xmlns:a="http://schemas.openxmlformats.org/drawingml/2006/main">
               <a:ext uri="{FF2B5EF4-FFF2-40B4-BE49-F238E27FC236}">
-                <a16:creationId xmlns:a16="http://schemas.microsoft.com/office/drawing/2014/main" id="{30E32F0D-7857-4F0A-B306-BFFFED9BC169}"/>
+                <a16:creationId xmlns:a16="http://schemas.microsoft.com/office/drawing/2014/main" id="{C1D0F9EC-328C-49F2-BBAB-06B189EBBDB9}"/>
               </a:ext>
             </a:extLst>
           </p:cNvPr>
@@ -1498,7 +1696,7 @@
           <p:cNvPr id="12" name="method-bus-anchor-2">
             <a:extLst xmlns:a="http://schemas.openxmlformats.org/drawingml/2006/main">
               <a:ext uri="{FF2B5EF4-FFF2-40B4-BE49-F238E27FC236}">
-                <a16:creationId xmlns:a16="http://schemas.microsoft.com/office/drawing/2014/main" id="{47E18B9A-A3E7-4AE2-A628-72CEDB102846}"/>
+                <a16:creationId xmlns:a16="http://schemas.microsoft.com/office/drawing/2014/main" id="{70584603-48DF-4685-96E2-E6B8196E6A99}"/>
               </a:ext>
             </a:extLst>
           </p:cNvPr>
@@ -1531,7 +1729,7 @@
           <p:cNvPr id="13" name="method-result-bus">
             <a:extLst xmlns:a="http://schemas.openxmlformats.org/drawingml/2006/main">
               <a:ext uri="{FF2B5EF4-FFF2-40B4-BE49-F238E27FC236}">
-                <a16:creationId xmlns:a16="http://schemas.microsoft.com/office/drawing/2014/main" id="{DB1DF353-89EC-41B3-B39F-95E2175B3A34}"/>
+                <a16:creationId xmlns:a16="http://schemas.microsoft.com/office/drawing/2014/main" id="{E045AF29-C8F3-4816-9881-73823F73837D}"/>
               </a:ext>
             </a:extLst>
           </p:cNvPr>
@@ -1562,7 +1760,7 @@
           <p:cNvPr id="14" name="result-link">
             <a:extLst xmlns:a="http://schemas.openxmlformats.org/drawingml/2006/main">
               <a:ext uri="{FF2B5EF4-FFF2-40B4-BE49-F238E27FC236}">
-                <a16:creationId xmlns:a16="http://schemas.microsoft.com/office/drawing/2014/main" id="{6D704D4C-BB40-414F-879F-90026C927D3D}"/>
+                <a16:creationId xmlns:a16="http://schemas.microsoft.com/office/drawing/2014/main" id="{99BE9043-557E-4467-8FE5-5163AB274E12}"/>
               </a:ext>
             </a:extLst>
           </p:cNvPr>
@@ -1593,7 +1791,7 @@
           <p:cNvPr id="15" name="result-arrow">
             <a:extLst xmlns:a="http://schemas.openxmlformats.org/drawingml/2006/main">
               <a:ext uri="{FF2B5EF4-FFF2-40B4-BE49-F238E27FC236}">
-                <a16:creationId xmlns:a16="http://schemas.microsoft.com/office/drawing/2014/main" id="{2366EC8C-837A-4644-884E-92FA9419F620}"/>
+                <a16:creationId xmlns:a16="http://schemas.microsoft.com/office/drawing/2014/main" id="{57D0DE27-1DF7-4637-9EBE-A4089AC5F85D}"/>
               </a:ext>
             </a:extLst>
           </p:cNvPr>
@@ -1727,7 +1925,7 @@
           <p:cNvPr id="16" name="phase-line">
             <a:extLst xmlns:a="http://schemas.openxmlformats.org/drawingml/2006/main">
               <a:ext uri="{FF2B5EF4-FFF2-40B4-BE49-F238E27FC236}">
-                <a16:creationId xmlns:a16="http://schemas.microsoft.com/office/drawing/2014/main" id="{13997C64-B0DC-4E32-9F0D-0DB0EBE82434}"/>
+                <a16:creationId xmlns:a16="http://schemas.microsoft.com/office/drawing/2014/main" id="{70B142B5-7973-4B5B-94CC-433CB17B97CB}"/>
               </a:ext>
             </a:extLst>
           </p:cNvPr>
@@ -1758,7 +1956,7 @@
           <p:cNvPr id="17" name="phase-problem-count">
             <a:extLst xmlns:a="http://schemas.openxmlformats.org/drawingml/2006/main">
               <a:ext uri="{FF2B5EF4-FFF2-40B4-BE49-F238E27FC236}">
-                <a16:creationId xmlns:a16="http://schemas.microsoft.com/office/drawing/2014/main" id="{E1FB796C-4915-493B-9615-82BEED0CD73D}"/>
+                <a16:creationId xmlns:a16="http://schemas.microsoft.com/office/drawing/2014/main" id="{EFDA7B99-37DE-4B75-BD24-43E177D82E8C}"/>
               </a:ext>
             </a:extLst>
           </p:cNvPr>
@@ -1788,11 +1986,11 @@
         <p:style>
           <a:lnRef xmlns:a="http://schemas.openxmlformats.org/drawingml/2006/main" idx="0"/>
           <a:fillRef xmlns:a="http://schemas.openxmlformats.org/drawingml/2006/main" idx="0"/>
-          <a:effectRef xmlns:a="http://schemas.openxmlformats.org/drawingml/2006/main" idx="10"/>
+          <a:effectRef xmlns:a="http://schemas.openxmlformats.org/drawingml/2006/main" idx="21"/>
           <a:fontRef xmlns:a="http://schemas.openxmlformats.org/drawingml/2006/main" idx="major"/>
         </p:style>
         <p:txBody>
-          <a:bodyPr xmlns:a="http://schemas.openxmlformats.org/drawingml/2006/main" lIns="0" tIns="0" rIns="0" bIns="0" anchor="ctr">
+          <a:bodyPr xmlns:a="http://schemas.openxmlformats.org/drawingml/2006/main" wrap="none" lIns="0" tIns="0" rIns="0" bIns="0" anchor="ctr">
             <a:noAutofit/>
           </a:bodyPr>
           <a:lstStyle xmlns:a="http://schemas.openxmlformats.org/drawingml/2006/main"/>
@@ -1802,7 +2000,7 @@
                 <a:spcPct val="100000"/>
               </a:lnSpc>
               <a:buNone/>
-              <a:defRPr sz="1800" b="1" i="0">
+              <a:defRPr sz="1700" b="1" i="0">
                 <a:solidFill>
                   <a:srgbClr val="FFFFFF"/>
                 </a:solidFill>
@@ -1812,7 +2010,7 @@
               </a:defRPr>
             </a:pPr>
             <a:r>
-              <a:rPr sz="1800" b="1" i="0">
+              <a:rPr sz="1700" b="1" i="0">
                 <a:solidFill>
                   <a:srgbClr val="FFFFFF"/>
                 </a:solidFill>
@@ -1830,19 +2028,19 @@
           <p:cNvPr id="18" name="phase-problem-label">
             <a:extLst xmlns:a="http://schemas.openxmlformats.org/drawingml/2006/main">
               <a:ext uri="{FF2B5EF4-FFF2-40B4-BE49-F238E27FC236}">
-                <a16:creationId xmlns:a16="http://schemas.microsoft.com/office/drawing/2014/main" id="{4D0237E0-C9A1-4774-A18A-7F26CF212790}"/>
-              </a:ext>
-            </a:extLst>
-          </p:cNvPr>
-          <p:cNvSpPr>
-            <a:spLocks xmlns:a="http://schemas.openxmlformats.org/drawingml/2006/main" noGrp="1"/>
-          </p:cNvSpPr>
-          <p:nvPr/>
-        </p:nvSpPr>
-        <p:spPr>
-          <a:xfrm xmlns:a="http://schemas.openxmlformats.org/drawingml/2006/main" rot="0">
-            <a:off x="633565" y="2238375"/>
-            <a:ext cx="466277" cy="215951"/>
+                <a16:creationId xmlns:a16="http://schemas.microsoft.com/office/drawing/2014/main" id="{69F224A3-AE74-4888-8302-78E32419F9B4}"/>
+              </a:ext>
+            </a:extLst>
+          </p:cNvPr>
+          <p:cNvSpPr>
+            <a:spLocks xmlns:a="http://schemas.openxmlformats.org/drawingml/2006/main" noGrp="1"/>
+          </p:cNvSpPr>
+          <p:nvPr/>
+        </p:nvSpPr>
+        <p:spPr>
+          <a:xfrm xmlns:a="http://schemas.openxmlformats.org/drawingml/2006/main" rot="0">
+            <a:off x="660949" y="2238375"/>
+            <a:ext cx="411509" cy="190500"/>
           </a:xfrm>
           <a:prstGeom xmlns:a="http://schemas.openxmlformats.org/drawingml/2006/main" prst="rect">
             <a:avLst/>
@@ -1854,7 +2052,79 @@
           </a:ln>
         </p:spPr>
         <p:txBody>
-          <a:bodyPr xmlns:a="http://schemas.openxmlformats.org/drawingml/2006/main" lIns="0" tIns="0" rIns="0" bIns="0" anchor="ctr">
+          <a:bodyPr xmlns:a="http://schemas.openxmlformats.org/drawingml/2006/main" wrap="none" lIns="0" tIns="0" rIns="0" bIns="0" anchor="ctr">
+            <a:noAutofit/>
+          </a:bodyPr>
+          <a:lstStyle xmlns:a="http://schemas.openxmlformats.org/drawingml/2006/main"/>
+          <a:p xmlns:a="http://schemas.openxmlformats.org/drawingml/2006/main">
+            <a:pPr algn="ctr">
+              <a:lnSpc>
+                <a:spcPct val="100000"/>
+              </a:lnSpc>
+              <a:buNone/>
+              <a:defRPr sz="1500" b="1" i="0">
+                <a:solidFill>
+                  <a:srgbClr val="4D6F9E"/>
+                </a:solidFill>
+                <a:latin typeface="Microsoft YaHei"/>
+                <a:ea typeface="Microsoft YaHei"/>
+                <a:cs typeface="Microsoft YaHei"/>
+              </a:defRPr>
+            </a:pPr>
+            <a:r>
+              <a:rPr sz="1500" b="1" i="0">
+                <a:solidFill>
+                  <a:srgbClr val="4D6F9E"/>
+                </a:solidFill>
+                <a:latin typeface="Microsoft YaHei"/>
+                <a:ea typeface="Microsoft YaHei"/>
+                <a:cs typeface="Microsoft YaHei"/>
+              </a:rPr>
+              <a:t>问题</a:t>
+            </a:r>
+          </a:p>
+        </p:txBody>
+      </p:sp>
+      <p:sp>
+        <p:nvSpPr>
+          <p:cNvPr id="19" name="phase-method-count">
+            <a:extLst xmlns:a="http://schemas.openxmlformats.org/drawingml/2006/main">
+              <a:ext uri="{FF2B5EF4-FFF2-40B4-BE49-F238E27FC236}">
+                <a16:creationId xmlns:a16="http://schemas.microsoft.com/office/drawing/2014/main" id="{63D90A30-E7FB-4FA6-B163-C7FF44197156}"/>
+              </a:ext>
+            </a:extLst>
+          </p:cNvPr>
+          <p:cNvSpPr>
+            <a:spLocks xmlns:a="http://schemas.openxmlformats.org/drawingml/2006/main" noGrp="1"/>
+          </p:cNvSpPr>
+          <p:nvPr/>
+        </p:nvSpPr>
+        <p:spPr>
+          <a:xfrm xmlns:a="http://schemas.openxmlformats.org/drawingml/2006/main" rot="0">
+            <a:off x="676275" y="3657600"/>
+            <a:ext cx="381000" cy="381000"/>
+          </a:xfrm>
+          <a:prstGeom xmlns:a="http://schemas.openxmlformats.org/drawingml/2006/main" prst="ellipse">
+            <a:avLst/>
+          </a:prstGeom>
+          <a:solidFill xmlns:a="http://schemas.openxmlformats.org/drawingml/2006/main">
+            <a:srgbClr val="2F5EA8"/>
+          </a:solidFill>
+          <a:ln xmlns:a="http://schemas.openxmlformats.org/drawingml/2006/main" w="9525">
+            <a:solidFill>
+              <a:srgbClr val="BFD3ED"/>
+            </a:solidFill>
+            <a:prstDash val="solid"/>
+          </a:ln>
+        </p:spPr>
+        <p:style>
+          <a:lnRef xmlns:a="http://schemas.openxmlformats.org/drawingml/2006/main" idx="0"/>
+          <a:fillRef xmlns:a="http://schemas.openxmlformats.org/drawingml/2006/main" idx="0"/>
+          <a:effectRef xmlns:a="http://schemas.openxmlformats.org/drawingml/2006/main" idx="21"/>
+          <a:fontRef xmlns:a="http://schemas.openxmlformats.org/drawingml/2006/main" idx="major"/>
+        </p:style>
+        <p:txBody>
+          <a:bodyPr xmlns:a="http://schemas.openxmlformats.org/drawingml/2006/main" wrap="none" lIns="0" tIns="0" rIns="0" bIns="0" anchor="ctr">
             <a:noAutofit/>
           </a:bodyPr>
           <a:lstStyle xmlns:a="http://schemas.openxmlformats.org/drawingml/2006/main"/>
@@ -1866,7 +2136,7 @@
               <a:buNone/>
               <a:defRPr sz="1700" b="1" i="0">
                 <a:solidFill>
-                  <a:srgbClr val="4D6F9E"/>
+                  <a:srgbClr val="FFFFFF"/>
                 </a:solidFill>
                 <a:latin typeface="Microsoft YaHei"/>
                 <a:ea typeface="Microsoft YaHei"/>
@@ -1875,78 +2145,6 @@
             </a:pPr>
             <a:r>
               <a:rPr sz="1700" b="1" i="0">
-                <a:solidFill>
-                  <a:srgbClr val="4D6F9E"/>
-                </a:solidFill>
-                <a:latin typeface="Microsoft YaHei"/>
-                <a:ea typeface="Microsoft YaHei"/>
-                <a:cs typeface="Microsoft YaHei"/>
-              </a:rPr>
-              <a:t>问题</a:t>
-            </a:r>
-          </a:p>
-        </p:txBody>
-      </p:sp>
-      <p:sp>
-        <p:nvSpPr>
-          <p:cNvPr id="19" name="phase-method-count">
-            <a:extLst xmlns:a="http://schemas.openxmlformats.org/drawingml/2006/main">
-              <a:ext uri="{FF2B5EF4-FFF2-40B4-BE49-F238E27FC236}">
-                <a16:creationId xmlns:a16="http://schemas.microsoft.com/office/drawing/2014/main" id="{2054BE4D-9EA8-492B-9B86-0C3F311C1B54}"/>
-              </a:ext>
-            </a:extLst>
-          </p:cNvPr>
-          <p:cNvSpPr>
-            <a:spLocks xmlns:a="http://schemas.openxmlformats.org/drawingml/2006/main" noGrp="1"/>
-          </p:cNvSpPr>
-          <p:nvPr/>
-        </p:nvSpPr>
-        <p:spPr>
-          <a:xfrm xmlns:a="http://schemas.openxmlformats.org/drawingml/2006/main" rot="0">
-            <a:off x="676275" y="3657600"/>
-            <a:ext cx="381000" cy="381000"/>
-          </a:xfrm>
-          <a:prstGeom xmlns:a="http://schemas.openxmlformats.org/drawingml/2006/main" prst="ellipse">
-            <a:avLst/>
-          </a:prstGeom>
-          <a:solidFill xmlns:a="http://schemas.openxmlformats.org/drawingml/2006/main">
-            <a:srgbClr val="2F5EA8"/>
-          </a:solidFill>
-          <a:ln xmlns:a="http://schemas.openxmlformats.org/drawingml/2006/main" w="9525">
-            <a:solidFill>
-              <a:srgbClr val="BFD3ED"/>
-            </a:solidFill>
-            <a:prstDash val="solid"/>
-          </a:ln>
-        </p:spPr>
-        <p:style>
-          <a:lnRef xmlns:a="http://schemas.openxmlformats.org/drawingml/2006/main" idx="0"/>
-          <a:fillRef xmlns:a="http://schemas.openxmlformats.org/drawingml/2006/main" idx="0"/>
-          <a:effectRef xmlns:a="http://schemas.openxmlformats.org/drawingml/2006/main" idx="10"/>
-          <a:fontRef xmlns:a="http://schemas.openxmlformats.org/drawingml/2006/main" idx="major"/>
-        </p:style>
-        <p:txBody>
-          <a:bodyPr xmlns:a="http://schemas.openxmlformats.org/drawingml/2006/main" lIns="0" tIns="0" rIns="0" bIns="0" anchor="ctr">
-            <a:noAutofit/>
-          </a:bodyPr>
-          <a:lstStyle xmlns:a="http://schemas.openxmlformats.org/drawingml/2006/main"/>
-          <a:p xmlns:a="http://schemas.openxmlformats.org/drawingml/2006/main">
-            <a:pPr algn="ctr">
-              <a:lnSpc>
-                <a:spcPct val="100000"/>
-              </a:lnSpc>
-              <a:buNone/>
-              <a:defRPr sz="1800" b="1" i="0">
-                <a:solidFill>
-                  <a:srgbClr val="FFFFFF"/>
-                </a:solidFill>
-                <a:latin typeface="Microsoft YaHei"/>
-                <a:ea typeface="Microsoft YaHei"/>
-                <a:cs typeface="Microsoft YaHei"/>
-              </a:defRPr>
-            </a:pPr>
-            <a:r>
-              <a:rPr sz="1800" b="1" i="0">
                 <a:solidFill>
                   <a:srgbClr val="FFFFFF"/>
                 </a:solidFill>
@@ -1964,19 +2162,19 @@
           <p:cNvPr id="20" name="phase-method-label">
             <a:extLst xmlns:a="http://schemas.openxmlformats.org/drawingml/2006/main">
               <a:ext uri="{FF2B5EF4-FFF2-40B4-BE49-F238E27FC236}">
-                <a16:creationId xmlns:a16="http://schemas.microsoft.com/office/drawing/2014/main" id="{AC914960-D630-45C4-B523-7F033A96A68D}"/>
-              </a:ext>
-            </a:extLst>
-          </p:cNvPr>
-          <p:cNvSpPr>
-            <a:spLocks xmlns:a="http://schemas.openxmlformats.org/drawingml/2006/main" noGrp="1"/>
-          </p:cNvSpPr>
-          <p:nvPr/>
-        </p:nvSpPr>
-        <p:spPr>
-          <a:xfrm xmlns:a="http://schemas.openxmlformats.org/drawingml/2006/main" rot="0">
-            <a:off x="633565" y="4086225"/>
-            <a:ext cx="466277" cy="215951"/>
+                <a16:creationId xmlns:a16="http://schemas.microsoft.com/office/drawing/2014/main" id="{06CB7E98-5039-4197-9787-B4465D0DA7E7}"/>
+              </a:ext>
+            </a:extLst>
+          </p:cNvPr>
+          <p:cNvSpPr>
+            <a:spLocks xmlns:a="http://schemas.openxmlformats.org/drawingml/2006/main" noGrp="1"/>
+          </p:cNvSpPr>
+          <p:nvPr/>
+        </p:nvSpPr>
+        <p:spPr>
+          <a:xfrm xmlns:a="http://schemas.openxmlformats.org/drawingml/2006/main" rot="0">
+            <a:off x="660949" y="4086225"/>
+            <a:ext cx="411509" cy="190500"/>
           </a:xfrm>
           <a:prstGeom xmlns:a="http://schemas.openxmlformats.org/drawingml/2006/main" prst="rect">
             <a:avLst/>
@@ -1988,7 +2186,79 @@
           </a:ln>
         </p:spPr>
         <p:txBody>
-          <a:bodyPr xmlns:a="http://schemas.openxmlformats.org/drawingml/2006/main" lIns="0" tIns="0" rIns="0" bIns="0" anchor="ctr">
+          <a:bodyPr xmlns:a="http://schemas.openxmlformats.org/drawingml/2006/main" wrap="none" lIns="0" tIns="0" rIns="0" bIns="0" anchor="ctr">
+            <a:noAutofit/>
+          </a:bodyPr>
+          <a:lstStyle xmlns:a="http://schemas.openxmlformats.org/drawingml/2006/main"/>
+          <a:p xmlns:a="http://schemas.openxmlformats.org/drawingml/2006/main">
+            <a:pPr algn="ctr">
+              <a:lnSpc>
+                <a:spcPct val="100000"/>
+              </a:lnSpc>
+              <a:buNone/>
+              <a:defRPr sz="1500" b="1" i="0">
+                <a:solidFill>
+                  <a:srgbClr val="4D6F9E"/>
+                </a:solidFill>
+                <a:latin typeface="Microsoft YaHei"/>
+                <a:ea typeface="Microsoft YaHei"/>
+                <a:cs typeface="Microsoft YaHei"/>
+              </a:defRPr>
+            </a:pPr>
+            <a:r>
+              <a:rPr sz="1500" b="1" i="0">
+                <a:solidFill>
+                  <a:srgbClr val="4D6F9E"/>
+                </a:solidFill>
+                <a:latin typeface="Microsoft YaHei"/>
+                <a:ea typeface="Microsoft YaHei"/>
+                <a:cs typeface="Microsoft YaHei"/>
+              </a:rPr>
+              <a:t>方法</a:t>
+            </a:r>
+          </a:p>
+        </p:txBody>
+      </p:sp>
+      <p:sp>
+        <p:nvSpPr>
+          <p:cNvPr id="21" name="phase-result-count">
+            <a:extLst xmlns:a="http://schemas.openxmlformats.org/drawingml/2006/main">
+              <a:ext uri="{FF2B5EF4-FFF2-40B4-BE49-F238E27FC236}">
+                <a16:creationId xmlns:a16="http://schemas.microsoft.com/office/drawing/2014/main" id="{DB30B0EE-1442-4910-AE23-7313944DEC51}"/>
+              </a:ext>
+            </a:extLst>
+          </p:cNvPr>
+          <p:cNvSpPr>
+            <a:spLocks xmlns:a="http://schemas.openxmlformats.org/drawingml/2006/main" noGrp="1"/>
+          </p:cNvSpPr>
+          <p:nvPr/>
+        </p:nvSpPr>
+        <p:spPr>
+          <a:xfrm xmlns:a="http://schemas.openxmlformats.org/drawingml/2006/main" rot="0">
+            <a:off x="676275" y="5438775"/>
+            <a:ext cx="381000" cy="381000"/>
+          </a:xfrm>
+          <a:prstGeom xmlns:a="http://schemas.openxmlformats.org/drawingml/2006/main" prst="ellipse">
+            <a:avLst/>
+          </a:prstGeom>
+          <a:solidFill xmlns:a="http://schemas.openxmlformats.org/drawingml/2006/main">
+            <a:srgbClr val="2F5EA8"/>
+          </a:solidFill>
+          <a:ln xmlns:a="http://schemas.openxmlformats.org/drawingml/2006/main" w="9525">
+            <a:solidFill>
+              <a:srgbClr val="BFD3ED"/>
+            </a:solidFill>
+            <a:prstDash val="solid"/>
+          </a:ln>
+        </p:spPr>
+        <p:style>
+          <a:lnRef xmlns:a="http://schemas.openxmlformats.org/drawingml/2006/main" idx="0"/>
+          <a:fillRef xmlns:a="http://schemas.openxmlformats.org/drawingml/2006/main" idx="0"/>
+          <a:effectRef xmlns:a="http://schemas.openxmlformats.org/drawingml/2006/main" idx="21"/>
+          <a:fontRef xmlns:a="http://schemas.openxmlformats.org/drawingml/2006/main" idx="major"/>
+        </p:style>
+        <p:txBody>
+          <a:bodyPr xmlns:a="http://schemas.openxmlformats.org/drawingml/2006/main" wrap="none" lIns="0" tIns="0" rIns="0" bIns="0" anchor="ctr">
             <a:noAutofit/>
           </a:bodyPr>
           <a:lstStyle xmlns:a="http://schemas.openxmlformats.org/drawingml/2006/main"/>
@@ -2000,7 +2270,7 @@
               <a:buNone/>
               <a:defRPr sz="1700" b="1" i="0">
                 <a:solidFill>
-                  <a:srgbClr val="4D6F9E"/>
+                  <a:srgbClr val="FFFFFF"/>
                 </a:solidFill>
                 <a:latin typeface="Microsoft YaHei"/>
                 <a:ea typeface="Microsoft YaHei"/>
@@ -2009,78 +2279,6 @@
             </a:pPr>
             <a:r>
               <a:rPr sz="1700" b="1" i="0">
-                <a:solidFill>
-                  <a:srgbClr val="4D6F9E"/>
-                </a:solidFill>
-                <a:latin typeface="Microsoft YaHei"/>
-                <a:ea typeface="Microsoft YaHei"/>
-                <a:cs typeface="Microsoft YaHei"/>
-              </a:rPr>
-              <a:t>方法</a:t>
-            </a:r>
-          </a:p>
-        </p:txBody>
-      </p:sp>
-      <p:sp>
-        <p:nvSpPr>
-          <p:cNvPr id="21" name="phase-result-count">
-            <a:extLst xmlns:a="http://schemas.openxmlformats.org/drawingml/2006/main">
-              <a:ext uri="{FF2B5EF4-FFF2-40B4-BE49-F238E27FC236}">
-                <a16:creationId xmlns:a16="http://schemas.microsoft.com/office/drawing/2014/main" id="{489011BF-5E65-42BF-A548-DED23446AA81}"/>
-              </a:ext>
-            </a:extLst>
-          </p:cNvPr>
-          <p:cNvSpPr>
-            <a:spLocks xmlns:a="http://schemas.openxmlformats.org/drawingml/2006/main" noGrp="1"/>
-          </p:cNvSpPr>
-          <p:nvPr/>
-        </p:nvSpPr>
-        <p:spPr>
-          <a:xfrm xmlns:a="http://schemas.openxmlformats.org/drawingml/2006/main" rot="0">
-            <a:off x="676275" y="5438775"/>
-            <a:ext cx="381000" cy="381000"/>
-          </a:xfrm>
-          <a:prstGeom xmlns:a="http://schemas.openxmlformats.org/drawingml/2006/main" prst="ellipse">
-            <a:avLst/>
-          </a:prstGeom>
-          <a:solidFill xmlns:a="http://schemas.openxmlformats.org/drawingml/2006/main">
-            <a:srgbClr val="2F5EA8"/>
-          </a:solidFill>
-          <a:ln xmlns:a="http://schemas.openxmlformats.org/drawingml/2006/main" w="9525">
-            <a:solidFill>
-              <a:srgbClr val="BFD3ED"/>
-            </a:solidFill>
-            <a:prstDash val="solid"/>
-          </a:ln>
-        </p:spPr>
-        <p:style>
-          <a:lnRef xmlns:a="http://schemas.openxmlformats.org/drawingml/2006/main" idx="0"/>
-          <a:fillRef xmlns:a="http://schemas.openxmlformats.org/drawingml/2006/main" idx="0"/>
-          <a:effectRef xmlns:a="http://schemas.openxmlformats.org/drawingml/2006/main" idx="10"/>
-          <a:fontRef xmlns:a="http://schemas.openxmlformats.org/drawingml/2006/main" idx="major"/>
-        </p:style>
-        <p:txBody>
-          <a:bodyPr xmlns:a="http://schemas.openxmlformats.org/drawingml/2006/main" lIns="0" tIns="0" rIns="0" bIns="0" anchor="ctr">
-            <a:noAutofit/>
-          </a:bodyPr>
-          <a:lstStyle xmlns:a="http://schemas.openxmlformats.org/drawingml/2006/main"/>
-          <a:p xmlns:a="http://schemas.openxmlformats.org/drawingml/2006/main">
-            <a:pPr algn="ctr">
-              <a:lnSpc>
-                <a:spcPct val="100000"/>
-              </a:lnSpc>
-              <a:buNone/>
-              <a:defRPr sz="1800" b="1" i="0">
-                <a:solidFill>
-                  <a:srgbClr val="FFFFFF"/>
-                </a:solidFill>
-                <a:latin typeface="Microsoft YaHei"/>
-                <a:ea typeface="Microsoft YaHei"/>
-                <a:cs typeface="Microsoft YaHei"/>
-              </a:defRPr>
-            </a:pPr>
-            <a:r>
-              <a:rPr sz="1800" b="1" i="0">
                 <a:solidFill>
                   <a:srgbClr val="FFFFFF"/>
                 </a:solidFill>
@@ -2098,19 +2296,19 @@
           <p:cNvPr id="22" name="phase-result-label">
             <a:extLst xmlns:a="http://schemas.openxmlformats.org/drawingml/2006/main">
               <a:ext uri="{FF2B5EF4-FFF2-40B4-BE49-F238E27FC236}">
-                <a16:creationId xmlns:a16="http://schemas.microsoft.com/office/drawing/2014/main" id="{859DB09B-3754-40FA-B769-B5EF9CA0393F}"/>
-              </a:ext>
-            </a:extLst>
-          </p:cNvPr>
-          <p:cNvSpPr>
-            <a:spLocks xmlns:a="http://schemas.openxmlformats.org/drawingml/2006/main" noGrp="1"/>
-          </p:cNvSpPr>
-          <p:nvPr/>
-        </p:nvSpPr>
-        <p:spPr>
-          <a:xfrm xmlns:a="http://schemas.openxmlformats.org/drawingml/2006/main" rot="0">
-            <a:off x="633565" y="5867400"/>
-            <a:ext cx="466277" cy="215951"/>
+                <a16:creationId xmlns:a16="http://schemas.microsoft.com/office/drawing/2014/main" id="{37E8E366-5FAC-4D6B-A913-5BB9C572DF3E}"/>
+              </a:ext>
+            </a:extLst>
+          </p:cNvPr>
+          <p:cNvSpPr>
+            <a:spLocks xmlns:a="http://schemas.openxmlformats.org/drawingml/2006/main" noGrp="1"/>
+          </p:cNvSpPr>
+          <p:nvPr/>
+        </p:nvSpPr>
+        <p:spPr>
+          <a:xfrm xmlns:a="http://schemas.openxmlformats.org/drawingml/2006/main" rot="0">
+            <a:off x="660949" y="5867400"/>
+            <a:ext cx="411509" cy="190500"/>
           </a:xfrm>
           <a:prstGeom xmlns:a="http://schemas.openxmlformats.org/drawingml/2006/main" prst="rect">
             <a:avLst/>
@@ -2122,7 +2320,7 @@
           </a:ln>
         </p:spPr>
         <p:txBody>
-          <a:bodyPr xmlns:a="http://schemas.openxmlformats.org/drawingml/2006/main" lIns="0" tIns="0" rIns="0" bIns="0" anchor="ctr">
+          <a:bodyPr xmlns:a="http://schemas.openxmlformats.org/drawingml/2006/main" wrap="none" lIns="0" tIns="0" rIns="0" bIns="0" anchor="ctr">
             <a:noAutofit/>
           </a:bodyPr>
           <a:lstStyle xmlns:a="http://schemas.openxmlformats.org/drawingml/2006/main"/>
@@ -2132,7 +2330,7 @@
                 <a:spcPct val="100000"/>
               </a:lnSpc>
               <a:buNone/>
-              <a:defRPr sz="1700" b="1" i="0">
+              <a:defRPr sz="1500" b="1" i="0">
                 <a:solidFill>
                   <a:srgbClr val="4D6F9E"/>
                 </a:solidFill>
@@ -2142,7 +2340,7 @@
               </a:defRPr>
             </a:pPr>
             <a:r>
-              <a:rPr sz="1700" b="1" i="0">
+              <a:rPr sz="1500" b="1" i="0">
                 <a:solidFill>
                   <a:srgbClr val="4D6F9E"/>
                 </a:solidFill>
@@ -2160,7 +2358,7 @@
           <p:cNvPr id="23" name="problem-underlay">
             <a:extLst xmlns:a="http://schemas.openxmlformats.org/drawingml/2006/main">
               <a:ext uri="{FF2B5EF4-FFF2-40B4-BE49-F238E27FC236}">
-                <a16:creationId xmlns:a16="http://schemas.microsoft.com/office/drawing/2014/main" id="{2D6151C6-7A2A-4673-A1DE-A7EA3B92612C}"/>
+                <a16:creationId xmlns:a16="http://schemas.microsoft.com/office/drawing/2014/main" id="{464587F0-0B8C-4EB0-97BE-5BCB1094E7A5}"/>
               </a:ext>
             </a:extLst>
           </p:cNvPr>
@@ -2193,7 +2391,7 @@
           <p:cNvPr id="24" name="problem-card">
             <a:extLst xmlns:a="http://schemas.openxmlformats.org/drawingml/2006/main">
               <a:ext uri="{FF2B5EF4-FFF2-40B4-BE49-F238E27FC236}">
-                <a16:creationId xmlns:a16="http://schemas.microsoft.com/office/drawing/2014/main" id="{3B1D4483-7EEC-49D8-8D6C-64D1A78B98A0}"/>
+                <a16:creationId xmlns:a16="http://schemas.microsoft.com/office/drawing/2014/main" id="{E2C45F13-DE82-4C9B-957C-E1748C342C53}"/>
               </a:ext>
             </a:extLst>
           </p:cNvPr>
@@ -2234,7 +2432,7 @@
         <p:style>
           <a:lnRef xmlns:a="http://schemas.openxmlformats.org/drawingml/2006/main" idx="0"/>
           <a:fillRef xmlns:a="http://schemas.openxmlformats.org/drawingml/2006/main" idx="0"/>
-          <a:effectRef xmlns:a="http://schemas.openxmlformats.org/drawingml/2006/main" idx="11"/>
+          <a:effectRef xmlns:a="http://schemas.openxmlformats.org/drawingml/2006/main" idx="13"/>
           <a:fontRef xmlns:a="http://schemas.openxmlformats.org/drawingml/2006/main" idx="major"/>
         </p:style>
       </p:sp>
@@ -2243,7 +2441,7 @@
           <p:cNvPr id="25" name="problem-label">
             <a:extLst xmlns:a="http://schemas.openxmlformats.org/drawingml/2006/main">
               <a:ext uri="{FF2B5EF4-FFF2-40B4-BE49-F238E27FC236}">
-                <a16:creationId xmlns:a16="http://schemas.microsoft.com/office/drawing/2014/main" id="{7DBC67FB-14CD-4FD2-B35D-E41B3890E374}"/>
+                <a16:creationId xmlns:a16="http://schemas.microsoft.com/office/drawing/2014/main" id="{9870EA31-D8A8-4DAB-B6D2-459F8548293C}"/>
               </a:ext>
             </a:extLst>
           </p:cNvPr>
@@ -2267,17 +2465,17 @@
           </a:ln>
         </p:spPr>
         <p:txBody>
-          <a:bodyPr xmlns:a="http://schemas.openxmlformats.org/drawingml/2006/main" lIns="0" tIns="0" rIns="0" bIns="0" anchor="ctr">
+          <a:bodyPr xmlns:a="http://schemas.openxmlformats.org/drawingml/2006/main" wrap="none" lIns="0" tIns="0" rIns="0" bIns="0" anchor="ctr">
             <a:noAutofit/>
           </a:bodyPr>
           <a:lstStyle xmlns:a="http://schemas.openxmlformats.org/drawingml/2006/main"/>
           <a:p xmlns:a="http://schemas.openxmlformats.org/drawingml/2006/main">
-            <a:pPr algn="l">
+            <a:pPr algn="ctr">
               <a:lnSpc>
                 <a:spcPct val="100000"/>
               </a:lnSpc>
               <a:buNone/>
-              <a:defRPr sz="1800" b="1" i="0">
+              <a:defRPr sz="1700" b="1" i="0">
                 <a:solidFill>
                   <a:srgbClr val="FFFFFF"/>
                 </a:solidFill>
@@ -2287,7 +2485,7 @@
               </a:defRPr>
             </a:pPr>
             <a:r>
-              <a:rPr sz="1800" b="1" i="0">
+              <a:rPr sz="1700" b="1" i="0">
                 <a:solidFill>
                   <a:srgbClr val="FFFFFF"/>
                 </a:solidFill>
@@ -2305,7 +2503,7 @@
           <p:cNvPr id="26" name="problem-divider">
             <a:extLst xmlns:a="http://schemas.openxmlformats.org/drawingml/2006/main">
               <a:ext uri="{FF2B5EF4-FFF2-40B4-BE49-F238E27FC236}">
-                <a16:creationId xmlns:a16="http://schemas.microsoft.com/office/drawing/2014/main" id="{4A5DFD66-C49A-418A-BA65-5638FBEE7B7C}"/>
+                <a16:creationId xmlns:a16="http://schemas.microsoft.com/office/drawing/2014/main" id="{10E78B26-3FFE-4870-A926-7F8C20E7DD54}"/>
               </a:ext>
             </a:extLst>
           </p:cNvPr>
@@ -2338,7 +2536,7 @@
           <p:cNvPr id="27" name="problem-title">
             <a:extLst xmlns:a="http://schemas.openxmlformats.org/drawingml/2006/main">
               <a:ext uri="{FF2B5EF4-FFF2-40B4-BE49-F238E27FC236}">
-                <a16:creationId xmlns:a16="http://schemas.microsoft.com/office/drawing/2014/main" id="{CD56090D-0E9A-413E-A214-DB1A2F986A37}"/>
+                <a16:creationId xmlns:a16="http://schemas.microsoft.com/office/drawing/2014/main" id="{1A183808-255B-42EF-BFE4-CD070170D68A}"/>
               </a:ext>
             </a:extLst>
           </p:cNvPr>
@@ -2362,7 +2560,7 @@
           </a:ln>
         </p:spPr>
         <p:txBody>
-          <a:bodyPr xmlns:a="http://schemas.openxmlformats.org/drawingml/2006/main" lIns="0" tIns="0" rIns="0" bIns="0" anchor="ctr">
+          <a:bodyPr xmlns:a="http://schemas.openxmlformats.org/drawingml/2006/main" wrap="square" lIns="0" tIns="0" rIns="0" bIns="0" anchor="ctr">
             <a:noAutofit/>
           </a:bodyPr>
           <a:lstStyle xmlns:a="http://schemas.openxmlformats.org/drawingml/2006/main"/>
@@ -2400,7 +2598,7 @@
           <p:cNvPr id="28" name="problem-body">
             <a:extLst xmlns:a="http://schemas.openxmlformats.org/drawingml/2006/main">
               <a:ext uri="{FF2B5EF4-FFF2-40B4-BE49-F238E27FC236}">
-                <a16:creationId xmlns:a16="http://schemas.microsoft.com/office/drawing/2014/main" id="{258A9110-DB18-4295-8E8B-70913DC7BFA3}"/>
+                <a16:creationId xmlns:a16="http://schemas.microsoft.com/office/drawing/2014/main" id="{FD166E5A-D854-4EAF-B3E9-9EC504B46487}"/>
               </a:ext>
             </a:extLst>
           </p:cNvPr>
@@ -2424,7 +2622,7 @@
           </a:ln>
         </p:spPr>
         <p:txBody>
-          <a:bodyPr xmlns:a="http://schemas.openxmlformats.org/drawingml/2006/main" lIns="0" tIns="0" rIns="0" bIns="0" anchor="ctr">
+          <a:bodyPr xmlns:a="http://schemas.openxmlformats.org/drawingml/2006/main" wrap="square" lIns="0" tIns="0" rIns="0" bIns="0" anchor="ctr">
             <a:noAutofit/>
           </a:bodyPr>
           <a:lstStyle xmlns:a="http://schemas.openxmlformats.org/drawingml/2006/main"/>
@@ -2466,7 +2664,7 @@
           <p:cNvPr id="29" name="method-card-0">
             <a:extLst xmlns:a="http://schemas.openxmlformats.org/drawingml/2006/main">
               <a:ext uri="{FF2B5EF4-FFF2-40B4-BE49-F238E27FC236}">
-                <a16:creationId xmlns:a16="http://schemas.microsoft.com/office/drawing/2014/main" id="{28565762-C418-4B0B-8DE4-1D4501165967}"/>
+                <a16:creationId xmlns:a16="http://schemas.microsoft.com/office/drawing/2014/main" id="{0691002B-6DAF-46DE-81D9-4F8B68C245FB}"/>
               </a:ext>
             </a:extLst>
           </p:cNvPr>
@@ -2515,7 +2713,7 @@
           <p:cNvPr id="30" name="method-accent-0">
             <a:extLst xmlns:a="http://schemas.openxmlformats.org/drawingml/2006/main">
               <a:ext uri="{FF2B5EF4-FFF2-40B4-BE49-F238E27FC236}">
-                <a16:creationId xmlns:a16="http://schemas.microsoft.com/office/drawing/2014/main" id="{ED046668-C69A-42EC-A28D-8C607F15046F}"/>
+                <a16:creationId xmlns:a16="http://schemas.microsoft.com/office/drawing/2014/main" id="{07B902C9-A47E-4784-9768-8449EC184B92}"/>
               </a:ext>
             </a:extLst>
           </p:cNvPr>
@@ -2556,7 +2754,7 @@
           <p:cNvPr id="31" name="method-number-0">
             <a:extLst xmlns:a="http://schemas.openxmlformats.org/drawingml/2006/main">
               <a:ext uri="{FF2B5EF4-FFF2-40B4-BE49-F238E27FC236}">
-                <a16:creationId xmlns:a16="http://schemas.microsoft.com/office/drawing/2014/main" id="{1D2D2B87-0356-4EA9-ADAD-BCA6D80E4D47}"/>
+                <a16:creationId xmlns:a16="http://schemas.microsoft.com/office/drawing/2014/main" id="{D484954F-F8D3-4DBF-B914-433B09807429}"/>
               </a:ext>
             </a:extLst>
           </p:cNvPr>
@@ -2584,17 +2782,17 @@
           </a:ln>
         </p:spPr>
         <p:txBody>
-          <a:bodyPr xmlns:a="http://schemas.openxmlformats.org/drawingml/2006/main" lIns="0" tIns="0" rIns="0" bIns="0" anchor="ctr">
+          <a:bodyPr xmlns:a="http://schemas.openxmlformats.org/drawingml/2006/main" wrap="none" lIns="0" tIns="0" rIns="0" bIns="0" anchor="ctr">
             <a:noAutofit/>
           </a:bodyPr>
           <a:lstStyle xmlns:a="http://schemas.openxmlformats.org/drawingml/2006/main"/>
           <a:p xmlns:a="http://schemas.openxmlformats.org/drawingml/2006/main">
-            <a:pPr algn="l">
+            <a:pPr algn="ctr">
               <a:lnSpc>
                 <a:spcPct val="100000"/>
               </a:lnSpc>
               <a:buNone/>
-              <a:defRPr sz="1700" b="1" i="0">
+              <a:defRPr sz="1500" b="1" i="0">
                 <a:solidFill>
                   <a:srgbClr val="FFFFFF"/>
                 </a:solidFill>
@@ -2604,7 +2802,7 @@
               </a:defRPr>
             </a:pPr>
             <a:r>
-              <a:rPr sz="1700" b="1" i="0">
+              <a:rPr sz="1500" b="1" i="0">
                 <a:solidFill>
                   <a:srgbClr val="FFFFFF"/>
                 </a:solidFill>
@@ -2622,7 +2820,7 @@
           <p:cNvPr id="32" name="method-title-0">
             <a:extLst xmlns:a="http://schemas.openxmlformats.org/drawingml/2006/main">
               <a:ext uri="{FF2B5EF4-FFF2-40B4-BE49-F238E27FC236}">
-                <a16:creationId xmlns:a16="http://schemas.microsoft.com/office/drawing/2014/main" id="{535884D4-CAD3-4FFA-9F2E-ECB31E135F25}"/>
+                <a16:creationId xmlns:a16="http://schemas.microsoft.com/office/drawing/2014/main" id="{500AEE8F-F953-4167-BBB5-5E477C56BBC6}"/>
               </a:ext>
             </a:extLst>
           </p:cNvPr>
@@ -2646,7 +2844,7 @@
           </a:ln>
         </p:spPr>
         <p:txBody>
-          <a:bodyPr xmlns:a="http://schemas.openxmlformats.org/drawingml/2006/main" lIns="0" tIns="0" rIns="0" bIns="0" anchor="ctr">
+          <a:bodyPr xmlns:a="http://schemas.openxmlformats.org/drawingml/2006/main" wrap="none" lIns="0" tIns="0" rIns="0" bIns="0" anchor="ctr">
             <a:noAutofit/>
           </a:bodyPr>
           <a:lstStyle xmlns:a="http://schemas.openxmlformats.org/drawingml/2006/main"/>
@@ -2656,7 +2854,7 @@
                 <a:spcPct val="115000"/>
               </a:lnSpc>
               <a:buNone/>
-              <a:defRPr sz="1800" b="1" i="0">
+              <a:defRPr sz="1700" b="1" i="0">
                 <a:solidFill>
                   <a:srgbClr val="244B7F"/>
                 </a:solidFill>
@@ -2666,7 +2864,7 @@
               </a:defRPr>
             </a:pPr>
             <a:r>
-              <a:rPr sz="1800" b="1" i="0">
+              <a:rPr sz="1700" b="1" i="0">
                 <a:solidFill>
                   <a:srgbClr val="244B7F"/>
                 </a:solidFill>
@@ -2684,7 +2882,7 @@
           <p:cNvPr id="33" name="method-body-0">
             <a:extLst xmlns:a="http://schemas.openxmlformats.org/drawingml/2006/main">
               <a:ext uri="{FF2B5EF4-FFF2-40B4-BE49-F238E27FC236}">
-                <a16:creationId xmlns:a16="http://schemas.microsoft.com/office/drawing/2014/main" id="{CDD1E5AE-D925-41E4-9585-5608BBA99D0C}"/>
+                <a16:creationId xmlns:a16="http://schemas.microsoft.com/office/drawing/2014/main" id="{2FFFDA29-F0DD-4AC3-8A13-3EA897C7F426}"/>
               </a:ext>
             </a:extLst>
           </p:cNvPr>
@@ -2708,7 +2906,7 @@
           </a:ln>
         </p:spPr>
         <p:txBody>
-          <a:bodyPr xmlns:a="http://schemas.openxmlformats.org/drawingml/2006/main" lIns="0" tIns="0" rIns="0" bIns="0" anchor="t">
+          <a:bodyPr xmlns:a="http://schemas.openxmlformats.org/drawingml/2006/main" wrap="none" lIns="0" tIns="0" rIns="0" bIns="0" anchor="t">
             <a:noAutofit/>
           </a:bodyPr>
           <a:lstStyle xmlns:a="http://schemas.openxmlformats.org/drawingml/2006/main"/>
@@ -2718,7 +2916,7 @@
                 <a:spcPct val="128000"/>
               </a:lnSpc>
               <a:buNone/>
-              <a:defRPr sz="1700" b="0" i="0">
+              <a:defRPr sz="1500" b="0" i="0">
                 <a:solidFill>
                   <a:srgbClr val="53667D"/>
                 </a:solidFill>
@@ -2728,7 +2926,7 @@
               </a:defRPr>
             </a:pPr>
             <a:r>
-              <a:rPr sz="1700" b="0" i="0">
+              <a:rPr sz="1500" b="0" i="0">
                 <a:solidFill>
                   <a:srgbClr val="53667D"/>
                 </a:solidFill>
@@ -2746,7 +2944,7 @@
           <p:cNvPr id="34" name="method-card-1">
             <a:extLst xmlns:a="http://schemas.openxmlformats.org/drawingml/2006/main">
               <a:ext uri="{FF2B5EF4-FFF2-40B4-BE49-F238E27FC236}">
-                <a16:creationId xmlns:a16="http://schemas.microsoft.com/office/drawing/2014/main" id="{45D319EA-6C40-461D-8A77-E4F124B89E48}"/>
+                <a16:creationId xmlns:a16="http://schemas.microsoft.com/office/drawing/2014/main" id="{8A7DD888-8677-4AF3-B196-9351644846E7}"/>
               </a:ext>
             </a:extLst>
           </p:cNvPr>
@@ -2795,7 +2993,7 @@
           <p:cNvPr id="35" name="method-accent-1">
             <a:extLst xmlns:a="http://schemas.openxmlformats.org/drawingml/2006/main">
               <a:ext uri="{FF2B5EF4-FFF2-40B4-BE49-F238E27FC236}">
-                <a16:creationId xmlns:a16="http://schemas.microsoft.com/office/drawing/2014/main" id="{8385D60F-23A3-48D4-9DBD-541FE6A7AE45}"/>
+                <a16:creationId xmlns:a16="http://schemas.microsoft.com/office/drawing/2014/main" id="{9CF304CE-A058-40FC-BB14-26DDD883BD37}"/>
               </a:ext>
             </a:extLst>
           </p:cNvPr>
@@ -2836,7 +3034,7 @@
           <p:cNvPr id="36" name="method-number-1">
             <a:extLst xmlns:a="http://schemas.openxmlformats.org/drawingml/2006/main">
               <a:ext uri="{FF2B5EF4-FFF2-40B4-BE49-F238E27FC236}">
-                <a16:creationId xmlns:a16="http://schemas.microsoft.com/office/drawing/2014/main" id="{4EFBA9AB-8387-414F-9666-E9791CB6EC7C}"/>
+                <a16:creationId xmlns:a16="http://schemas.microsoft.com/office/drawing/2014/main" id="{C554390B-2B25-4795-AAEC-1EDBE83866B3}"/>
               </a:ext>
             </a:extLst>
           </p:cNvPr>
@@ -2864,17 +3062,17 @@
           </a:ln>
         </p:spPr>
         <p:txBody>
-          <a:bodyPr xmlns:a="http://schemas.openxmlformats.org/drawingml/2006/main" lIns="0" tIns="0" rIns="0" bIns="0" anchor="ctr">
+          <a:bodyPr xmlns:a="http://schemas.openxmlformats.org/drawingml/2006/main" wrap="none" lIns="0" tIns="0" rIns="0" bIns="0" anchor="ctr">
             <a:noAutofit/>
           </a:bodyPr>
           <a:lstStyle xmlns:a="http://schemas.openxmlformats.org/drawingml/2006/main"/>
           <a:p xmlns:a="http://schemas.openxmlformats.org/drawingml/2006/main">
-            <a:pPr algn="l">
+            <a:pPr algn="ctr">
               <a:lnSpc>
                 <a:spcPct val="100000"/>
               </a:lnSpc>
               <a:buNone/>
-              <a:defRPr sz="1700" b="1" i="0">
+              <a:defRPr sz="1500" b="1" i="0">
                 <a:solidFill>
                   <a:srgbClr val="FFFFFF"/>
                 </a:solidFill>
@@ -2884,7 +3082,7 @@
               </a:defRPr>
             </a:pPr>
             <a:r>
-              <a:rPr sz="1700" b="1" i="0">
+              <a:rPr sz="1500" b="1" i="0">
                 <a:solidFill>
                   <a:srgbClr val="FFFFFF"/>
                 </a:solidFill>
@@ -2902,7 +3100,7 @@
           <p:cNvPr id="37" name="method-title-1">
             <a:extLst xmlns:a="http://schemas.openxmlformats.org/drawingml/2006/main">
               <a:ext uri="{FF2B5EF4-FFF2-40B4-BE49-F238E27FC236}">
-                <a16:creationId xmlns:a16="http://schemas.microsoft.com/office/drawing/2014/main" id="{6CB4C5F8-0F8F-4556-BB44-A497F01768B3}"/>
+                <a16:creationId xmlns:a16="http://schemas.microsoft.com/office/drawing/2014/main" id="{ECBF5F47-4D1E-4ED1-9FE8-73D8360237D2}"/>
               </a:ext>
             </a:extLst>
           </p:cNvPr>
@@ -2926,7 +3124,7 @@
           </a:ln>
         </p:spPr>
         <p:txBody>
-          <a:bodyPr xmlns:a="http://schemas.openxmlformats.org/drawingml/2006/main" lIns="0" tIns="0" rIns="0" bIns="0" anchor="ctr">
+          <a:bodyPr xmlns:a="http://schemas.openxmlformats.org/drawingml/2006/main" wrap="none" lIns="0" tIns="0" rIns="0" bIns="0" anchor="ctr">
             <a:noAutofit/>
           </a:bodyPr>
           <a:lstStyle xmlns:a="http://schemas.openxmlformats.org/drawingml/2006/main"/>
@@ -2936,7 +3134,7 @@
                 <a:spcPct val="115000"/>
               </a:lnSpc>
               <a:buNone/>
-              <a:defRPr sz="1800" b="1" i="0">
+              <a:defRPr sz="1700" b="1" i="0">
                 <a:solidFill>
                   <a:srgbClr val="244B7F"/>
                 </a:solidFill>
@@ -2946,7 +3144,7 @@
               </a:defRPr>
             </a:pPr>
             <a:r>
-              <a:rPr sz="1800" b="1" i="0">
+              <a:rPr sz="1700" b="1" i="0">
                 <a:solidFill>
                   <a:srgbClr val="244B7F"/>
                 </a:solidFill>
@@ -2964,7 +3162,7 @@
           <p:cNvPr id="38" name="method-body-1">
             <a:extLst xmlns:a="http://schemas.openxmlformats.org/drawingml/2006/main">
               <a:ext uri="{FF2B5EF4-FFF2-40B4-BE49-F238E27FC236}">
-                <a16:creationId xmlns:a16="http://schemas.microsoft.com/office/drawing/2014/main" id="{BA32248D-ECC7-4919-88CB-D89411A6FD7E}"/>
+                <a16:creationId xmlns:a16="http://schemas.microsoft.com/office/drawing/2014/main" id="{1FEDC0F9-5354-4AE9-8FF4-EF40E0DA403A}"/>
               </a:ext>
             </a:extLst>
           </p:cNvPr>
@@ -2988,7 +3186,7 @@
           </a:ln>
         </p:spPr>
         <p:txBody>
-          <a:bodyPr xmlns:a="http://schemas.openxmlformats.org/drawingml/2006/main" lIns="0" tIns="0" rIns="0" bIns="0" anchor="t">
+          <a:bodyPr xmlns:a="http://schemas.openxmlformats.org/drawingml/2006/main" wrap="none" lIns="0" tIns="0" rIns="0" bIns="0" anchor="t">
             <a:noAutofit/>
           </a:bodyPr>
           <a:lstStyle xmlns:a="http://schemas.openxmlformats.org/drawingml/2006/main"/>
@@ -2998,7 +3196,7 @@
                 <a:spcPct val="128000"/>
               </a:lnSpc>
               <a:buNone/>
-              <a:defRPr sz="1700" b="0" i="0">
+              <a:defRPr sz="1500" b="0" i="0">
                 <a:solidFill>
                   <a:srgbClr val="53667D"/>
                 </a:solidFill>
@@ -3008,7 +3206,7 @@
               </a:defRPr>
             </a:pPr>
             <a:r>
-              <a:rPr sz="1700" b="0" i="0">
+              <a:rPr sz="1500" b="0" i="0">
                 <a:solidFill>
                   <a:srgbClr val="53667D"/>
                 </a:solidFill>
@@ -3026,7 +3224,7 @@
           <p:cNvPr id="39" name="method-card-2">
             <a:extLst xmlns:a="http://schemas.openxmlformats.org/drawingml/2006/main">
               <a:ext uri="{FF2B5EF4-FFF2-40B4-BE49-F238E27FC236}">
-                <a16:creationId xmlns:a16="http://schemas.microsoft.com/office/drawing/2014/main" id="{70B16808-F7F8-40E4-AE98-4EA95CCD8AB0}"/>
+                <a16:creationId xmlns:a16="http://schemas.microsoft.com/office/drawing/2014/main" id="{1298B346-87E6-44B0-B5C3-495064AAE9CB}"/>
               </a:ext>
             </a:extLst>
           </p:cNvPr>
@@ -3075,7 +3273,7 @@
           <p:cNvPr id="40" name="method-accent-2">
             <a:extLst xmlns:a="http://schemas.openxmlformats.org/drawingml/2006/main">
               <a:ext uri="{FF2B5EF4-FFF2-40B4-BE49-F238E27FC236}">
-                <a16:creationId xmlns:a16="http://schemas.microsoft.com/office/drawing/2014/main" id="{18FC0B61-AA62-4D5B-90C8-EF9F7D27A679}"/>
+                <a16:creationId xmlns:a16="http://schemas.microsoft.com/office/drawing/2014/main" id="{AA1C06E6-DBA3-4D25-AB7F-9910B22DD0E4}"/>
               </a:ext>
             </a:extLst>
           </p:cNvPr>
@@ -3116,7 +3314,7 @@
           <p:cNvPr id="41" name="method-number-2">
             <a:extLst xmlns:a="http://schemas.openxmlformats.org/drawingml/2006/main">
               <a:ext uri="{FF2B5EF4-FFF2-40B4-BE49-F238E27FC236}">
-                <a16:creationId xmlns:a16="http://schemas.microsoft.com/office/drawing/2014/main" id="{238F24F6-F445-4EB1-AECF-84A8454EABE1}"/>
+                <a16:creationId xmlns:a16="http://schemas.microsoft.com/office/drawing/2014/main" id="{22C05639-D376-4513-8453-16768E4B38DA}"/>
               </a:ext>
             </a:extLst>
           </p:cNvPr>
@@ -3144,17 +3342,17 @@
           </a:ln>
         </p:spPr>
         <p:txBody>
-          <a:bodyPr xmlns:a="http://schemas.openxmlformats.org/drawingml/2006/main" lIns="0" tIns="0" rIns="0" bIns="0" anchor="ctr">
+          <a:bodyPr xmlns:a="http://schemas.openxmlformats.org/drawingml/2006/main" wrap="none" lIns="0" tIns="0" rIns="0" bIns="0" anchor="ctr">
             <a:noAutofit/>
           </a:bodyPr>
           <a:lstStyle xmlns:a="http://schemas.openxmlformats.org/drawingml/2006/main"/>
           <a:p xmlns:a="http://schemas.openxmlformats.org/drawingml/2006/main">
-            <a:pPr algn="l">
+            <a:pPr algn="ctr">
               <a:lnSpc>
                 <a:spcPct val="100000"/>
               </a:lnSpc>
               <a:buNone/>
-              <a:defRPr sz="1700" b="1" i="0">
+              <a:defRPr sz="1500" b="1" i="0">
                 <a:solidFill>
                   <a:srgbClr val="FFFFFF"/>
                 </a:solidFill>
@@ -3164,7 +3362,7 @@
               </a:defRPr>
             </a:pPr>
             <a:r>
-              <a:rPr sz="1700" b="1" i="0">
+              <a:rPr sz="1500" b="1" i="0">
                 <a:solidFill>
                   <a:srgbClr val="FFFFFF"/>
                 </a:solidFill>
@@ -3182,7 +3380,7 @@
           <p:cNvPr id="42" name="method-title-2">
             <a:extLst xmlns:a="http://schemas.openxmlformats.org/drawingml/2006/main">
               <a:ext uri="{FF2B5EF4-FFF2-40B4-BE49-F238E27FC236}">
-                <a16:creationId xmlns:a16="http://schemas.microsoft.com/office/drawing/2014/main" id="{77F4BA0A-7441-4A01-BF78-F8C6FED408CD}"/>
+                <a16:creationId xmlns:a16="http://schemas.microsoft.com/office/drawing/2014/main" id="{17446047-23F1-4770-9C5E-499657F25A1A}"/>
               </a:ext>
             </a:extLst>
           </p:cNvPr>
@@ -3206,7 +3404,7 @@
           </a:ln>
         </p:spPr>
         <p:txBody>
-          <a:bodyPr xmlns:a="http://schemas.openxmlformats.org/drawingml/2006/main" lIns="0" tIns="0" rIns="0" bIns="0" anchor="ctr">
+          <a:bodyPr xmlns:a="http://schemas.openxmlformats.org/drawingml/2006/main" wrap="none" lIns="0" tIns="0" rIns="0" bIns="0" anchor="ctr">
             <a:noAutofit/>
           </a:bodyPr>
           <a:lstStyle xmlns:a="http://schemas.openxmlformats.org/drawingml/2006/main"/>
@@ -3216,7 +3414,7 @@
                 <a:spcPct val="115000"/>
               </a:lnSpc>
               <a:buNone/>
-              <a:defRPr sz="1800" b="1" i="0">
+              <a:defRPr sz="1700" b="1" i="0">
                 <a:solidFill>
                   <a:srgbClr val="244B7F"/>
                 </a:solidFill>
@@ -3226,7 +3424,7 @@
               </a:defRPr>
             </a:pPr>
             <a:r>
-              <a:rPr sz="1800" b="1" i="0">
+              <a:rPr sz="1700" b="1" i="0">
                 <a:solidFill>
                   <a:srgbClr val="244B7F"/>
                 </a:solidFill>
@@ -3244,7 +3442,7 @@
           <p:cNvPr id="43" name="method-body-2">
             <a:extLst xmlns:a="http://schemas.openxmlformats.org/drawingml/2006/main">
               <a:ext uri="{FF2B5EF4-FFF2-40B4-BE49-F238E27FC236}">
-                <a16:creationId xmlns:a16="http://schemas.microsoft.com/office/drawing/2014/main" id="{FA764D18-24E0-44BD-8C5D-01FA4E0F15B1}"/>
+                <a16:creationId xmlns:a16="http://schemas.microsoft.com/office/drawing/2014/main" id="{A6079E0C-2552-468F-8BBE-954C55E01E90}"/>
               </a:ext>
             </a:extLst>
           </p:cNvPr>
@@ -3268,7 +3466,7 @@
           </a:ln>
         </p:spPr>
         <p:txBody>
-          <a:bodyPr xmlns:a="http://schemas.openxmlformats.org/drawingml/2006/main" lIns="0" tIns="0" rIns="0" bIns="0" anchor="t">
+          <a:bodyPr xmlns:a="http://schemas.openxmlformats.org/drawingml/2006/main" wrap="none" lIns="0" tIns="0" rIns="0" bIns="0" anchor="t">
             <a:noAutofit/>
           </a:bodyPr>
           <a:lstStyle xmlns:a="http://schemas.openxmlformats.org/drawingml/2006/main"/>
@@ -3278,7 +3476,7 @@
                 <a:spcPct val="128000"/>
               </a:lnSpc>
               <a:buNone/>
-              <a:defRPr sz="1700" b="0" i="0">
+              <a:defRPr sz="1500" b="0" i="0">
                 <a:solidFill>
                   <a:srgbClr val="53667D"/>
                 </a:solidFill>
@@ -3288,7 +3486,7 @@
               </a:defRPr>
             </a:pPr>
             <a:r>
-              <a:rPr sz="1700" b="0" i="0">
+              <a:rPr sz="1500" b="0" i="0">
                 <a:solidFill>
                   <a:srgbClr val="53667D"/>
                 </a:solidFill>
@@ -3306,7 +3504,7 @@
           <p:cNvPr id="44" name="result-card">
             <a:extLst xmlns:a="http://schemas.openxmlformats.org/drawingml/2006/main">
               <a:ext uri="{FF2B5EF4-FFF2-40B4-BE49-F238E27FC236}">
-                <a16:creationId xmlns:a16="http://schemas.microsoft.com/office/drawing/2014/main" id="{89FDF544-1099-494D-AD98-0BDAC5E19CD1}"/>
+                <a16:creationId xmlns:a16="http://schemas.microsoft.com/office/drawing/2014/main" id="{FB6AAA43-842C-4387-B3CC-15DA01A51431}"/>
               </a:ext>
             </a:extLst>
           </p:cNvPr>
@@ -3349,7 +3547,7 @@
         <p:style>
           <a:lnRef xmlns:a="http://schemas.openxmlformats.org/drawingml/2006/main" idx="0"/>
           <a:fillRef xmlns:a="http://schemas.openxmlformats.org/drawingml/2006/main" idx="0"/>
-          <a:effectRef xmlns:a="http://schemas.openxmlformats.org/drawingml/2006/main" idx="13"/>
+          <a:effectRef xmlns:a="http://schemas.openxmlformats.org/drawingml/2006/main" idx="11"/>
           <a:fontRef xmlns:a="http://schemas.openxmlformats.org/drawingml/2006/main" idx="major"/>
         </p:style>
       </p:sp>
@@ -3358,19 +3556,19 @@
           <p:cNvPr id="45" name="result-title">
             <a:extLst xmlns:a="http://schemas.openxmlformats.org/drawingml/2006/main">
               <a:ext uri="{FF2B5EF4-FFF2-40B4-BE49-F238E27FC236}">
-                <a16:creationId xmlns:a16="http://schemas.microsoft.com/office/drawing/2014/main" id="{EAB12029-4192-4A0F-B897-D350D6999F98}"/>
-              </a:ext>
-            </a:extLst>
-          </p:cNvPr>
-          <p:cNvSpPr>
-            <a:spLocks xmlns:a="http://schemas.openxmlformats.org/drawingml/2006/main" noGrp="1"/>
-          </p:cNvSpPr>
-          <p:nvPr/>
-        </p:nvSpPr>
-        <p:spPr>
-          <a:xfrm xmlns:a="http://schemas.openxmlformats.org/drawingml/2006/main" rot="0">
-            <a:off x="2800350" y="5410200"/>
-            <a:ext cx="8582025" cy="280835"/>
+                <a16:creationId xmlns:a16="http://schemas.microsoft.com/office/drawing/2014/main" id="{2030484F-6502-49F0-9D18-6159FE9A04AA}"/>
+              </a:ext>
+            </a:extLst>
+          </p:cNvPr>
+          <p:cNvSpPr>
+            <a:spLocks xmlns:a="http://schemas.openxmlformats.org/drawingml/2006/main" noGrp="1"/>
+          </p:cNvSpPr>
+          <p:nvPr/>
+        </p:nvSpPr>
+        <p:spPr>
+          <a:xfrm xmlns:a="http://schemas.openxmlformats.org/drawingml/2006/main" rot="0">
+            <a:off x="2800350" y="5401713"/>
+            <a:ext cx="8582025" cy="306591"/>
           </a:xfrm>
           <a:prstGeom xmlns:a="http://schemas.openxmlformats.org/drawingml/2006/main" prst="rect">
             <a:avLst/>
@@ -3382,7 +3580,7 @@
           </a:ln>
         </p:spPr>
         <p:txBody>
-          <a:bodyPr xmlns:a="http://schemas.openxmlformats.org/drawingml/2006/main" lIns="0" tIns="0" rIns="0" bIns="0" anchor="ctr">
+          <a:bodyPr xmlns:a="http://schemas.openxmlformats.org/drawingml/2006/main" wrap="square" lIns="0" tIns="0" rIns="0" bIns="0" anchor="ctr">
             <a:noAutofit/>
           </a:bodyPr>
           <a:lstStyle xmlns:a="http://schemas.openxmlformats.org/drawingml/2006/main"/>
@@ -3420,19 +3618,19 @@
           <p:cNvPr id="46" name="result-body">
             <a:extLst xmlns:a="http://schemas.openxmlformats.org/drawingml/2006/main">
               <a:ext uri="{FF2B5EF4-FFF2-40B4-BE49-F238E27FC236}">
-                <a16:creationId xmlns:a16="http://schemas.microsoft.com/office/drawing/2014/main" id="{261A375B-7C4F-4A8D-9A49-89F46D8038A6}"/>
-              </a:ext>
-            </a:extLst>
-          </p:cNvPr>
-          <p:cNvSpPr>
-            <a:spLocks xmlns:a="http://schemas.openxmlformats.org/drawingml/2006/main" noGrp="1"/>
-          </p:cNvSpPr>
-          <p:nvPr/>
-        </p:nvSpPr>
-        <p:spPr>
-          <a:xfrm xmlns:a="http://schemas.openxmlformats.org/drawingml/2006/main" rot="0">
-            <a:off x="2800350" y="5748185"/>
-            <a:ext cx="8582025" cy="233515"/>
+                <a16:creationId xmlns:a16="http://schemas.microsoft.com/office/drawing/2014/main" id="{4ABC75CE-CBCD-4969-819B-ECB5926BCAFA}"/>
+              </a:ext>
+            </a:extLst>
+          </p:cNvPr>
+          <p:cNvSpPr>
+            <a:spLocks xmlns:a="http://schemas.openxmlformats.org/drawingml/2006/main" noGrp="1"/>
+          </p:cNvSpPr>
+          <p:nvPr/>
+        </p:nvSpPr>
+        <p:spPr>
+          <a:xfrm xmlns:a="http://schemas.openxmlformats.org/drawingml/2006/main" rot="0">
+            <a:off x="2800350" y="5765454"/>
+            <a:ext cx="8582025" cy="224733"/>
           </a:xfrm>
           <a:prstGeom xmlns:a="http://schemas.openxmlformats.org/drawingml/2006/main" prst="rect">
             <a:avLst/>
@@ -3444,7 +3642,7 @@
           </a:ln>
         </p:spPr>
         <p:txBody>
-          <a:bodyPr xmlns:a="http://schemas.openxmlformats.org/drawingml/2006/main" lIns="0" tIns="0" rIns="0" bIns="0" anchor="ctr">
+          <a:bodyPr xmlns:a="http://schemas.openxmlformats.org/drawingml/2006/main" wrap="square" lIns="0" tIns="0" rIns="0" bIns="0" anchor="ctr">
             <a:noAutofit/>
           </a:bodyPr>
           <a:lstStyle xmlns:a="http://schemas.openxmlformats.org/drawingml/2006/main"/>
@@ -3454,7 +3652,7 @@
                 <a:spcPct val="118000"/>
               </a:lnSpc>
               <a:buNone/>
-              <a:defRPr sz="1700" b="0" i="0">
+              <a:defRPr sz="1500" b="0" i="0">
                 <a:solidFill>
                   <a:srgbClr val="566B84"/>
                 </a:solidFill>
@@ -3464,7 +3662,7 @@
               </a:defRPr>
             </a:pPr>
             <a:r>
-              <a:rPr sz="1700" b="0" i="0">
+              <a:rPr sz="1500" b="0" i="0">
                 <a:solidFill>
                   <a:srgbClr val="566B84"/>
                 </a:solidFill>
@@ -3482,7 +3680,7 @@
           <p:cNvPr id="47" name="result-badge">
             <a:extLst xmlns:a="http://schemas.openxmlformats.org/drawingml/2006/main">
               <a:ext uri="{FF2B5EF4-FFF2-40B4-BE49-F238E27FC236}">
-                <a16:creationId xmlns:a16="http://schemas.microsoft.com/office/drawing/2014/main" id="{124C1E07-51B0-4B2C-8F98-22FDE194091A}"/>
+                <a16:creationId xmlns:a16="http://schemas.microsoft.com/office/drawing/2014/main" id="{7449169A-E5E5-4F39-87B8-DE85584E2A7E}"/>
               </a:ext>
             </a:extLst>
           </p:cNvPr>
@@ -3512,11 +3710,11 @@
         <p:style>
           <a:lnRef xmlns:a="http://schemas.openxmlformats.org/drawingml/2006/main" idx="0"/>
           <a:fillRef xmlns:a="http://schemas.openxmlformats.org/drawingml/2006/main" idx="0"/>
-          <a:effectRef xmlns:a="http://schemas.openxmlformats.org/drawingml/2006/main" idx="14"/>
+          <a:effectRef xmlns:a="http://schemas.openxmlformats.org/drawingml/2006/main" idx="22"/>
           <a:fontRef xmlns:a="http://schemas.openxmlformats.org/drawingml/2006/main" idx="major"/>
         </p:style>
         <p:txBody>
-          <a:bodyPr xmlns:a="http://schemas.openxmlformats.org/drawingml/2006/main" lIns="0" tIns="0" rIns="0" bIns="0" anchor="ctr">
+          <a:bodyPr xmlns:a="http://schemas.openxmlformats.org/drawingml/2006/main" wrap="none" lIns="0" tIns="0" rIns="0" bIns="0" anchor="ctr">
             <a:noAutofit/>
           </a:bodyPr>
           <a:lstStyle xmlns:a="http://schemas.openxmlformats.org/drawingml/2006/main"/>
@@ -3526,7 +3724,7 @@
                 <a:spcPct val="100000"/>
               </a:lnSpc>
               <a:buNone/>
-              <a:defRPr sz="1800" b="1" i="0">
+              <a:defRPr sz="1700" b="1" i="0">
                 <a:solidFill>
                   <a:srgbClr val="FFFFFF"/>
                 </a:solidFill>
@@ -3536,7 +3734,7 @@
               </a:defRPr>
             </a:pPr>
             <a:r>
-              <a:rPr sz="1800" b="1" i="0">
+              <a:rPr sz="1700" b="1" i="0">
                 <a:solidFill>
                   <a:srgbClr val="FFFFFF"/>
                 </a:solidFill>
@@ -3552,7 +3750,7 @@
     </p:spTree>
     <p:extLst>
       <p:ext uri="{BB962C8B-B14F-4D97-AF65-F5344CB8AC3E}">
-        <p14:creationId xmlns:p14="http://schemas.microsoft.com/office/powerpoint/2010/main" val="2042310526"/>
+        <p14:creationId xmlns:p14="http://schemas.microsoft.com/office/powerpoint/2010/main" val="229242625"/>
       </p:ext>
     </p:extLst>
   </p:cSld>
@@ -3762,6 +3960,105 @@
         </a:effectStyle>
         <a:effectStyle>
           <a:effectLst>
+            <a:outerShdw blurRad="266700" dist="114300" dir="5400000">
+              <a:srgbClr val="2F5EA8">
+                <a:alpha val="22000"/>
+              </a:srgbClr>
+            </a:outerShdw>
+          </a:effectLst>
+        </a:effectStyle>
+        <a:effectStyle>
+          <a:effectLst>
+            <a:outerShdw blurRad="152400" dist="66675" dir="5400000">
+              <a:srgbClr val="2F5EA8">
+                <a:alpha val="9000"/>
+              </a:srgbClr>
+            </a:outerShdw>
+          </a:effectLst>
+        </a:effectStyle>
+        <a:effectStyle>
+          <a:effectLst>
+            <a:outerShdw blurRad="152400" dist="66675" dir="5400000">
+              <a:srgbClr val="2F5EA8">
+                <a:alpha val="10000"/>
+              </a:srgbClr>
+            </a:outerShdw>
+          </a:effectLst>
+        </a:effectStyle>
+        <a:effectStyle>
+          <a:effectLst>
+            <a:outerShdw blurRad="171450" dist="76200" dir="5400000">
+              <a:srgbClr val="2F5EA8">
+                <a:alpha val="16000"/>
+              </a:srgbClr>
+            </a:outerShdw>
+          </a:effectLst>
+        </a:effectStyle>
+        <a:effectStyle>
+          <a:effectLst>
+            <a:outerShdw blurRad="114300" dist="47625" dir="5400000">
+              <a:srgbClr val="2F5EA8">
+                <a:alpha val="7000"/>
+              </a:srgbClr>
+            </a:outerShdw>
+          </a:effectLst>
+        </a:effectStyle>
+        <a:effectStyle>
+          <a:effectLst>
+            <a:outerShdw blurRad="95250" dist="38100" dir="5400000">
+              <a:srgbClr val="2F5EA8">
+                <a:alpha val="8000"/>
+              </a:srgbClr>
+            </a:outerShdw>
+          </a:effectLst>
+        </a:effectStyle>
+        <a:effectStyle>
+          <a:effectLst>
+            <a:outerShdw blurRad="209550" dist="95250" dir="5400000">
+              <a:srgbClr val="2F5EA8">
+                <a:alpha val="8000"/>
+              </a:srgbClr>
+            </a:outerShdw>
+          </a:effectLst>
+        </a:effectStyle>
+        <a:effectStyle>
+          <a:effectLst>
+            <a:outerShdw blurRad="133350" dist="57150" dir="5400000">
+              <a:srgbClr val="2F5EA8">
+                <a:alpha val="18000"/>
+              </a:srgbClr>
+            </a:outerShdw>
+          </a:effectLst>
+        </a:effectStyle>
+        <a:effectStyle>
+          <a:effectLst>
+            <a:outerShdw blurRad="200025" dist="85725" dir="5400000">
+              <a:srgbClr val="2F5EA8">
+                <a:alpha val="14000"/>
+              </a:srgbClr>
+            </a:outerShdw>
+          </a:effectLst>
+        </a:effectStyle>
+        <a:effectStyle>
+          <a:effectLst>
+            <a:outerShdw blurRad="171450" dist="76200" dir="5400000">
+              <a:srgbClr val="264E80">
+                <a:alpha val="10000"/>
+              </a:srgbClr>
+            </a:outerShdw>
+          </a:effectLst>
+        </a:effectStyle>
+        <a:effectStyle>
+          <a:effectLst>
+            <a:outerShdw blurRad="171450" dist="76200" dir="5400000">
+              <a:srgbClr val="1F497E">
+                <a:alpha val="8000"/>
+              </a:srgbClr>
+            </a:outerShdw>
+          </a:effectLst>
+        </a:effectStyle>
+        <a:effectStyle>
+          <a:effectLst>
             <a:outerShdw blurRad="95250" dist="38100" dir="5400000">
               <a:srgbClr val="2F5EA8">
                 <a:alpha val="16000"/>
@@ -3771,36 +4068,36 @@
         </a:effectStyle>
         <a:effectStyle>
           <a:effectLst>
-            <a:outerShdw blurRad="171450" dist="76200" dir="5400000">
-              <a:srgbClr val="2F5EA8">
-                <a:alpha val="16000"/>
-              </a:srgbClr>
-            </a:outerShdw>
-          </a:effectLst>
-        </a:effectStyle>
-        <a:effectStyle>
-          <a:effectLst>
-            <a:outerShdw blurRad="152400" dist="66675" dir="5400000">
-              <a:srgbClr val="2F5EA8">
-                <a:alpha val="10000"/>
-              </a:srgbClr>
-            </a:outerShdw>
-          </a:effectLst>
-        </a:effectStyle>
-        <a:effectStyle>
-          <a:effectLst>
-            <a:outerShdw blurRad="152400" dist="66675" dir="5400000">
-              <a:srgbClr val="2F5EA8">
-                <a:alpha val="9000"/>
-              </a:srgbClr>
-            </a:outerShdw>
-          </a:effectLst>
-        </a:effectStyle>
-        <a:effectStyle>
-          <a:effectLst>
             <a:outerShdw blurRad="114300" dist="57150" dir="5400000">
               <a:srgbClr val="2F5EA8">
                 <a:alpha val="15000"/>
+              </a:srgbClr>
+            </a:outerShdw>
+          </a:effectLst>
+        </a:effectStyle>
+        <a:effectStyle>
+          <a:effectLst>
+            <a:outerShdw blurRad="114300" dist="47625" dir="5400000">
+              <a:srgbClr val="2F5EA8">
+                <a:alpha val="20000"/>
+              </a:srgbClr>
+            </a:outerShdw>
+          </a:effectLst>
+        </a:effectStyle>
+        <a:effectStyle>
+          <a:effectLst>
+            <a:outerShdw blurRad="190500" dist="85725" dir="5400000">
+              <a:srgbClr val="2F5EA8">
+                <a:alpha val="9000"/>
+              </a:srgbClr>
+            </a:outerShdw>
+          </a:effectLst>
+        </a:effectStyle>
+        <a:effectStyle>
+          <a:effectLst>
+            <a:outerShdw blurRad="266700" dist="133350" dir="5400000">
+              <a:srgbClr val="2F5EA8">
+                <a:alpha val="24000"/>
               </a:srgbClr>
             </a:outerShdw>
           </a:effectLst>
